--- a/courses/BUS-629-VEMBA-International-Corporate-Finance/BUS629_AI_Ratios_Project.pptx
+++ b/courses/BUS-629-VEMBA-International-Corporate-Finance/BUS629_AI_Ratios_Project.pptx
@@ -2985,7 +2985,7 @@
                 <a:ea typeface="Open Sans" pitchFamily="34" charset="-122"/>
                 <a:cs typeface="Open Sans" pitchFamily="34" charset="-120"/>
               </a:rPr>
-              <a:t>20% of project  |  Execute the spec, evaluate the output, own the result</a:t>
+              <a:t>25% of project  |  Full analysis + LLM evaluation + repo polish  |  70% deliverable / 30% presentation</a:t>
             </a:r>
             <a:endParaRPr lang="en-US" sz="1100" dirty="0"/>
           </a:p>
@@ -6574,7 +6574,7 @@
                 <a:ea typeface="Open Sans" pitchFamily="34" charset="-122"/>
                 <a:cs typeface="Open Sans" pitchFamily="34" charset="-120"/>
               </a:rPr>
-              <a:t>Build your template, choose your company, populate real data</a:t>
+              <a:t>Upload the provided template, choose your company, populate real data</a:t>
             </a:r>
             <a:endParaRPr lang="en-US" sz="1300" dirty="0"/>
           </a:p>
@@ -6595,7 +6595,7 @@
                 <a:ea typeface="Open Sans" pitchFamily="34" charset="-122"/>
                 <a:cs typeface="Open Sans" pitchFamily="34" charset="-120"/>
               </a:rPr>
-              <a:t>Write a spec precise enough that an LLM can execute it</a:t>
+              <a:t>Draft a spec with an LLM — precise enough that a fresh LLM can execute it cold</a:t>
             </a:r>
             <a:endParaRPr lang="en-US" sz="1300" dirty="0"/>
           </a:p>
@@ -6882,7 +6882,7 @@
       </p:sp>
       <p:pic>
         <p:nvPicPr>
-          <p:cNvPr id="7" name="Image 0" descr="preencoded.png">    </p:cNvPr>
+          <p:cNvPr id="7" name="Image 0" descr="preencoded.png"/>
           <p:cNvPicPr>
             <a:picLocks noChangeAspect="1"/>
           </p:cNvPicPr>
@@ -7051,7 +7051,7 @@
       </p:sp>
       <p:pic>
         <p:nvPicPr>
-          <p:cNvPr id="13" name="Image 1" descr="preencoded.png">    </p:cNvPr>
+          <p:cNvPr id="13" name="Image 1" descr="preencoded.png"/>
           <p:cNvPicPr>
             <a:picLocks noChangeAspect="1"/>
           </p:cNvPicPr>
@@ -7220,7 +7220,7 @@
       </p:sp>
       <p:pic>
         <p:nvPicPr>
-          <p:cNvPr id="19" name="Image 2" descr="preencoded.png">    </p:cNvPr>
+          <p:cNvPr id="19" name="Image 2" descr="preencoded.png"/>
           <p:cNvPicPr>
             <a:picLocks noChangeAspect="1"/>
           </p:cNvPicPr>
@@ -7389,7 +7389,7 @@
       </p:sp>
       <p:pic>
         <p:nvPicPr>
-          <p:cNvPr id="25" name="Image 3" descr="preencoded.png">    </p:cNvPr>
+          <p:cNvPr id="25" name="Image 3" descr="preencoded.png"/>
           <p:cNvPicPr>
             <a:picLocks noChangeAspect="1"/>
           </p:cNvPicPr>
@@ -7536,7 +7536,7 @@
                 <a:ea typeface="Open Sans" pitchFamily="34" charset="-122"/>
                 <a:cs typeface="Open Sans" pitchFamily="34" charset="-120"/>
               </a:rPr>
-              <a:t>  — Instructor</a:t>
+              <a:t xml:space="preserve">  — Instructor</a:t>
             </a:r>
             <a:endParaRPr lang="en-US" sz="1000" dirty="0"/>
           </a:p>
@@ -7646,7 +7646,7 @@
                 <a:ea typeface="Open Sans" pitchFamily="34" charset="-122"/>
                 <a:cs typeface="Open Sans" pitchFamily="34" charset="-120"/>
               </a:rPr>
-              <a:t>SETUP  →  BUILD  →  FRAME  →  POPULATE  →  SPECIFY  →  EVALUATE</a:t>
+              <a:t>SETUP  →  TEMPLATE  →  FRAME  →  POPULATE  →  SPECIFY  →  EVALUATE</a:t>
             </a:r>
             <a:endParaRPr lang="en-US" sz="1100" dirty="0"/>
           </a:p>
@@ -8013,7 +8013,7 @@
                 <a:ea typeface="Open Sans" pitchFamily="34" charset="-122"/>
                 <a:cs typeface="Open Sans" pitchFamily="34" charset="-120"/>
               </a:rPr>
-              <a:t>Template Architecture</a:t>
+              <a:t>Ratios Template Upload</a:t>
             </a:r>
             <a:endParaRPr lang="en-US" sz="1200" dirty="0"/>
           </a:p>
@@ -8052,7 +8052,7 @@
                 <a:ea typeface="Open Sans" pitchFamily="34" charset="-122"/>
                 <a:cs typeface="Open Sans" pitchFamily="34" charset="-120"/>
               </a:rPr>
-              <a:t>Build a complete ratio spreadsheet template from scratch. No skeleton provided.</a:t>
+              <a:t>Use the provided ratios template. Upload an unmodified copy and study its structure.</a:t>
             </a:r>
             <a:endParaRPr lang="en-US" sz="1000" dirty="0"/>
           </a:p>
@@ -8380,7 +8380,7 @@
                 <a:ea typeface="Open Sans" pitchFamily="34" charset="-122"/>
                 <a:cs typeface="Open Sans" pitchFamily="34" charset="-120"/>
               </a:rPr>
-              <a:t>25%</a:t>
+              <a:t>20%</a:t>
             </a:r>
             <a:endParaRPr lang="en-US" sz="1100" dirty="0"/>
           </a:p>
@@ -8458,7 +8458,7 @@
                 <a:ea typeface="Open Sans" pitchFamily="34" charset="-122"/>
                 <a:cs typeface="Open Sans" pitchFamily="34" charset="-120"/>
               </a:rPr>
-              <a:t>Populate template with real data. Compute all ratios. Self-audit with Big 4-style checklist.</a:t>
+              <a:t>Populate the template with real financials. Ratios auto-compute. Self-audit with Big 4-style checklist.</a:t>
             </a:r>
             <a:endParaRPr lang="en-US" sz="1000" dirty="0"/>
           </a:p>
@@ -8661,7 +8661,7 @@
                 <a:ea typeface="Open Sans" pitchFamily="34" charset="-122"/>
                 <a:cs typeface="Open Sans" pitchFamily="34" charset="-120"/>
               </a:rPr>
-              <a:t>Write a spec defining the model AND the analysis. An LLM should be able to execute it cold.</a:t>
+              <a:t>Use an LLM to draft a spec defining the model AND the analysis. Edit, refine, and log every prompt.</a:t>
             </a:r>
             <a:endParaRPr lang="en-US" sz="1000" dirty="0"/>
           </a:p>
@@ -8786,7 +8786,7 @@
                 <a:ea typeface="Open Sans" pitchFamily="34" charset="-122"/>
                 <a:cs typeface="Open Sans" pitchFamily="34" charset="-120"/>
               </a:rPr>
-              <a:t>20%</a:t>
+              <a:t>25%</a:t>
             </a:r>
             <a:endParaRPr lang="en-US" sz="1100" dirty="0"/>
           </a:p>
@@ -8864,7 +8864,7 @@
                 <a:ea typeface="Open Sans" pitchFamily="34" charset="-122"/>
                 <a:cs typeface="Open Sans" pitchFamily="34" charset="-120"/>
               </a:rPr>
-              <a:t>Execute the spec with an LLM. Evaluate, correct, and annotate the output. Own the final product.</a:t>
+              <a:t>Execute the spec, write the full analysis, evaluate AI output, polish your repo. Own the final product.</a:t>
             </a:r>
             <a:endParaRPr lang="en-US" sz="1000" dirty="0"/>
           </a:p>
@@ -9355,7 +9355,7 @@
                 <a:ea typeface="Open Sans" pitchFamily="34" charset="-122"/>
                 <a:cs typeface="Open Sans" pitchFamily="34" charset="-120"/>
               </a:rPr>
-              <a:t>Build the</a:t>
+              <a:t>Study the</a:t>
             </a:r>
             <a:endParaRPr lang="en-US" sz="1000" dirty="0"/>
           </a:p>
@@ -9411,7 +9411,7 @@
                 <a:ea typeface="Open Sans" pitchFamily="34" charset="-122"/>
                 <a:cs typeface="Open Sans" pitchFamily="34" charset="-120"/>
               </a:rPr>
-              <a:t>“I built it”</a:t>
+              <a:t>“I see how it’s built”</a:t>
             </a:r>
             <a:endParaRPr lang="en-US" sz="900" dirty="0"/>
           </a:p>
@@ -10721,7 +10721,7 @@
       </p:sp>
       <p:pic>
         <p:nvPicPr>
-          <p:cNvPr id="8" name="Image 0" descr="preencoded.png">    </p:cNvPr>
+          <p:cNvPr id="8" name="Image 0" descr="preencoded.png"/>
           <p:cNvPicPr>
             <a:picLocks noChangeAspect="1"/>
           </p:cNvPicPr>
@@ -10843,7 +10843,7 @@
       </p:sp>
       <p:pic>
         <p:nvPicPr>
-          <p:cNvPr id="12" name="Image 1" descr="preencoded.png">    </p:cNvPr>
+          <p:cNvPr id="12" name="Image 1" descr="preencoded.png"/>
           <p:cNvPicPr>
             <a:picLocks noChangeAspect="1"/>
           </p:cNvPicPr>
@@ -10965,7 +10965,7 @@
       </p:sp>
       <p:pic>
         <p:nvPicPr>
-          <p:cNvPr id="16" name="Image 2" descr="preencoded.png">    </p:cNvPr>
+          <p:cNvPr id="16" name="Image 2" descr="preencoded.png"/>
           <p:cNvPicPr>
             <a:picLocks noChangeAspect="1"/>
           </p:cNvPicPr>
@@ -11087,7 +11087,7 @@
       </p:sp>
       <p:pic>
         <p:nvPicPr>
-          <p:cNvPr id="20" name="Image 3" descr="preencoded.png">    </p:cNvPr>
+          <p:cNvPr id="20" name="Image 3" descr="preencoded.png"/>
           <p:cNvPicPr>
             <a:picLocks noChangeAspect="1"/>
           </p:cNvPicPr>
@@ -11311,7 +11311,7 @@
                 <a:ea typeface="Open Sans" pitchFamily="34" charset="-122"/>
                 <a:cs typeface="Open Sans" pitchFamily="34" charset="-120"/>
               </a:rPr>
-              <a:t>Stage 1 — Template Architecture</a:t>
+              <a:t>Stage 1 — Ratios Template Upload</a:t>
             </a:r>
             <a:endParaRPr lang="en-US" sz="2000" dirty="0"/>
           </a:p>
@@ -11350,7 +11350,7 @@
                 <a:ea typeface="Open Sans" pitchFamily="34" charset="-122"/>
                 <a:cs typeface="Open Sans" pitchFamily="34" charset="-120"/>
               </a:rPr>
-              <a:t>20% of project  |  Build a complete ratio spreadsheet from scratch</a:t>
+              <a:t>20% of project  |  Upload-only — use the provided ratios template, do not modify</a:t>
             </a:r>
             <a:endParaRPr lang="en-US" sz="1100" dirty="0"/>
           </a:p>
@@ -11389,7 +11389,7 @@
                 <a:ea typeface="Open Sans" pitchFamily="34" charset="-122"/>
                 <a:cs typeface="Open Sans" pitchFamily="34" charset="-120"/>
               </a:rPr>
-              <a:t>Your template must include:</a:t>
+              <a:t>The provided template includes:</a:t>
             </a:r>
             <a:endParaRPr lang="en-US" sz="1300" dirty="0"/>
           </a:p>
@@ -11453,7 +11453,7 @@
                 <a:ea typeface="Open Sans" pitchFamily="34" charset="-122"/>
                 <a:cs typeface="Open Sans" pitchFamily="34" charset="-120"/>
               </a:rPr>
-              <a:t>Ratios tab with input section and all six ratio categories</a:t>
+              <a:t>Ratios tab with all six categories pre-filled in named-range notation</a:t>
             </a:r>
             <a:endParaRPr lang="en-US" sz="1100" dirty="0"/>
           </a:p>
@@ -11474,7 +11474,7 @@
                 <a:ea typeface="Open Sans" pitchFamily="34" charset="-122"/>
                 <a:cs typeface="Open Sans" pitchFamily="34" charset="-120"/>
               </a:rPr>
-              <a:t>Named ranges defined (empty but named)</a:t>
+              <a:t>Named ranges (BAL_*, INC_*, CASH_*, RATIO_*) defined throughout</a:t>
             </a:r>
             <a:endParaRPr lang="en-US" sz="1100" dirty="0"/>
           </a:p>
@@ -11516,7 +11516,7 @@
                 <a:ea typeface="Open Sans" pitchFamily="34" charset="-122"/>
                 <a:cs typeface="Open Sans" pitchFamily="34" charset="-120"/>
               </a:rPr>
-              <a:t>Notes tab documenting layout decisions</a:t>
+              <a:t>Cover &amp; Instructions tab with project overview and named-range key</a:t>
             </a:r>
             <a:endParaRPr lang="en-US" sz="1100" dirty="0"/>
           </a:p>
@@ -14156,7 +14156,7 @@
                 <a:ea typeface="Open Sans" pitchFamily="34" charset="-122"/>
                 <a:cs typeface="Open Sans" pitchFamily="34" charset="-120"/>
               </a:rPr>
-              <a:t>25% of project  |  The most heavily weighted analytical stage</a:t>
+              <a:t>20% of project  |  Populate the financials — full analysis comes in Stage 5</a:t>
             </a:r>
             <a:endParaRPr lang="en-US" sz="1100" dirty="0"/>
           </a:p>
@@ -14271,7 +14271,7 @@
                 <a:ea typeface="Open Sans" pitchFamily="34" charset="-122"/>
                 <a:cs typeface="Open Sans" pitchFamily="34" charset="-120"/>
               </a:rPr>
-              <a:t>    saved to models/builds/</a:t>
+              <a:t xml:space="preserve">    saved to models/builds/</a:t>
             </a:r>
             <a:endParaRPr lang="en-US" sz="1100" dirty="0"/>
           </a:p>
@@ -14347,7 +14347,7 @@
                 <a:ea typeface="Open Sans" pitchFamily="34" charset="-122"/>
                 <a:cs typeface="Open Sans" pitchFamily="34" charset="-120"/>
               </a:rPr>
-              <a:t>    saved to analysis/validation/</a:t>
+              <a:t xml:space="preserve">    saved to analysis/validation/</a:t>
             </a:r>
             <a:endParaRPr lang="en-US" sz="1100" dirty="0"/>
           </a:p>
@@ -15153,7 +15153,7 @@
                 <a:ea typeface="Open Sans" pitchFamily="34" charset="-122"/>
                 <a:cs typeface="Open Sans" pitchFamily="34" charset="-120"/>
               </a:rPr>
-              <a:t>20% of project  |  The central artifact</a:t>
+              <a:t>20% of project  |  LLM-drafted, student-refined  |  70% deliverable / 30% presentation</a:t>
             </a:r>
             <a:endParaRPr lang="en-US" sz="1100" dirty="0"/>
           </a:p>
@@ -16806,7 +16806,7 @@
                 <a:ea typeface="Open Sans" pitchFamily="34" charset="-122"/>
                 <a:cs typeface="Open Sans" pitchFamily="34" charset="-120"/>
               </a:rPr>
-              <a:t>Hand Part A + Part B to an LLM with zero context. If the output is substantially correct, your spec works. If not, the spec has gaps — and finding those gaps is the learning.</a:t>
+              <a:t>Use an LLM to draft Part A + Part B from your Stage 3 model. Refine the draft, then test it against a fresh LLM session — if the cold output mirrors your model, the spec is precise enough. Log every prompt.</a:t>
             </a:r>
             <a:endParaRPr lang="en-US" sz="1000" dirty="0"/>
           </a:p>
@@ -16865,7 +16865,7 @@
                 <a:ea typeface="Open Sans" pitchFamily="34" charset="-122"/>
                 <a:cs typeface="Open Sans" pitchFamily="34" charset="-120"/>
               </a:rPr>
-              <a:t>Rubric:  Data &amp; Structure 25%  |  Ratios &amp; Validation 25%  |  Analysis Spec 25%  |  Spec Craft &amp; Clarity 25%</a:t>
+              <a:t>Rubric:  Data &amp; Structure 25%  |  Ratios &amp; Validation 25%  |  Analysis Spec 25%  |  Spec Craft + Prompt Log 25%</a:t>
             </a:r>
             <a:endParaRPr lang="en-US" sz="1000" dirty="0"/>
           </a:p>

--- a/courses/BUS-629-VEMBA-International-Corporate-Finance/BUS629_AI_Ratios_Project.pptx
+++ b/courses/BUS-629-VEMBA-International-Corporate-Finance/BUS629_AI_Ratios_Project.pptx
@@ -20,6 +20,7 @@
     <p:sldId id="275" r:id="rId26"/>
     <p:sldId id="276" r:id="rId27"/>
     <p:sldId id="271" r:id="rId11"/>
+    <p:sldId id="277" r:id="rId28"/>
     <p:sldId id="261" r:id="rId12"/>
     <p:sldId id="262" r:id="rId13"/>
     <p:sldId id="263" r:id="rId14"/>
@@ -27,6 +28,7 @@
     <p:sldId id="265" r:id="rId16"/>
     <p:sldId id="266" r:id="rId17"/>
     <p:sldId id="268" r:id="rId18"/>
+    <p:sldId id="278" r:id="rId29"/>
     <p:sldId id="272" r:id="rId20"/>
   </p:sldIdLst>
   <p:sldSz cx="9144000" cy="5143500" type="screen16x9"/>
@@ -3148,13 +3150,13 @@
         <p:spPr>
           <a:xfrm>
             <a:off x="0" y="0"/>
-            <a:ext cx="9144000" cy="36576"/>
+            <a:ext cx="9144000" cy="640080"/>
           </a:xfrm>
           <a:prstGeom prst="rect">
             <a:avLst/>
           </a:prstGeom>
           <a:solidFill>
-            <a:srgbClr val="B8975C"/>
+            <a:srgbClr val="024731"/>
           </a:solidFill>
           <a:ln/>
         </p:spPr>
@@ -4619,7 +4621,7 @@
                 <a:ea typeface="Open Sans" pitchFamily="34" charset="-122"/>
                 <a:cs typeface="Open Sans" pitchFamily="34" charset="-120"/>
               </a:rPr>
-              <a:t>Green = Formulas</a:t>
+              <a:t>Green text = Formulas</a:t>
             </a:r>
             <a:endParaRPr lang="en-US" sz="800" dirty="0"/>
           </a:p>
@@ -15313,13 +15315,13 @@
         <p:spPr>
           <a:xfrm>
             <a:off x="0" y="0"/>
-            <a:ext cx="9144000" cy="36576"/>
+            <a:ext cx="9144000" cy="640080"/>
           </a:xfrm>
           <a:prstGeom prst="rect">
             <a:avLst/>
           </a:prstGeom>
           <a:solidFill>
-            <a:srgbClr val="B8975C"/>
+            <a:srgbClr val="024731"/>
           </a:solidFill>
           <a:ln/>
         </p:spPr>
@@ -16266,13 +16268,13 @@
         <p:spPr>
           <a:xfrm>
             <a:off x="0" y="0"/>
-            <a:ext cx="9144000" cy="36576"/>
+            <a:ext cx="9144000" cy="640080"/>
           </a:xfrm>
           <a:prstGeom prst="rect">
             <a:avLst/>
           </a:prstGeom>
           <a:solidFill>
-            <a:srgbClr val="B8975C"/>
+            <a:srgbClr val="024731"/>
           </a:solidFill>
           <a:ln/>
         </p:spPr>
@@ -17180,6 +17182,1282 @@
                 </a:solidFill>
               </a:rPr>
               <a:t>The first LLM draft is rarely the strongest. Try a different angle, then pick.</a:t>
+            </a:r>
+            <a:endParaRPr lang="en-US" sz="1100" dirty="0"/>
+          </a:p>
+        </p:txBody>
+      </p:sp>
+    </p:spTree>
+  </p:cSld>
+  <p:clrMapOvr>
+    <a:masterClrMapping/>
+  </p:clrMapOvr>
+</p:sld>
+</file>
+
+<file path=ppt/slides/slide22.xml><?xml version="1.0" encoding="utf-8"?>
+<p:sld xmlns:a="http://schemas.openxmlformats.org/drawingml/2006/main" xmlns:r="http://schemas.openxmlformats.org/officeDocument/2006/relationships" xmlns:p="http://schemas.openxmlformats.org/presentationml/2006/main">
+  <p:cSld>
+    <p:spTree>
+      <p:nvGrpSpPr>
+        <p:cNvPr id="1" name=""/>
+        <p:cNvGrpSpPr/>
+        <p:nvPr/>
+      </p:nvGrpSpPr>
+      <p:grpSpPr>
+        <a:xfrm>
+          <a:off x="0" y="0"/>
+          <a:ext cx="0" cy="0"/>
+          <a:chOff x="0" y="0"/>
+          <a:chExt cx="0" cy="0"/>
+        </a:xfrm>
+      </p:grpSpPr>
+      <p:sp>
+        <p:nvSpPr>
+          <p:cNvPr id="2" name="Shape 0"/>
+          <p:cNvSpPr/>
+          <p:nvPr/>
+        </p:nvSpPr>
+        <p:spPr>
+          <a:xfrm>
+            <a:off x="0" y="0"/>
+            <a:ext cx="9144000" cy="822960"/>
+          </a:xfrm>
+          <a:prstGeom prst="rect">
+            <a:avLst/>
+          </a:prstGeom>
+          <a:solidFill>
+            <a:srgbClr val="024731"/>
+          </a:solidFill>
+          <a:ln/>
+        </p:spPr>
+        <p:txBody>
+          <a:bodyPr/>
+          <a:lstStyle/>
+          <a:p>
+            <a:endParaRPr lang="en-US"/>
+          </a:p>
+        </p:txBody>
+      </p:sp>
+      <p:sp>
+        <p:nvSpPr>
+          <p:cNvPr id="3" name="Shape 1"/>
+          <p:cNvSpPr/>
+          <p:nvPr/>
+        </p:nvSpPr>
+        <p:spPr>
+          <a:xfrm>
+            <a:off x="0" y="4709160"/>
+            <a:ext cx="9144000" cy="434340"/>
+          </a:xfrm>
+          <a:prstGeom prst="rect">
+            <a:avLst/>
+          </a:prstGeom>
+          <a:solidFill>
+            <a:srgbClr val="36454F"/>
+          </a:solidFill>
+          <a:ln/>
+        </p:spPr>
+        <p:txBody>
+          <a:bodyPr/>
+          <a:lstStyle/>
+          <a:p>
+            <a:endParaRPr lang="en-US"/>
+          </a:p>
+        </p:txBody>
+      </p:sp>
+      <p:sp>
+        <p:nvSpPr>
+          <p:cNvPr id="4" name="Text 2"/>
+          <p:cNvSpPr/>
+          <p:nvPr/>
+        </p:nvSpPr>
+        <p:spPr>
+          <a:xfrm>
+            <a:off x="457200" y="4754880"/>
+            <a:ext cx="8229600" cy="320040"/>
+          </a:xfrm>
+          <a:prstGeom prst="rect">
+            <a:avLst/>
+          </a:prstGeom>
+          <a:noFill/>
+          <a:ln/>
+        </p:spPr>
+        <p:txBody>
+          <a:bodyPr wrap="square" rtlCol="0" anchor="ctr"/>
+          <a:lstStyle/>
+          <a:p>
+            <a:pPr marL="0" indent="0" algn="ctr">
+              <a:buNone/>
+            </a:pPr>
+            <a:r>
+              <a:rPr lang="en-US" sz="900" dirty="0">
+                <a:solidFill>
+                  <a:srgbClr val="8A9BAD"/>
+                </a:solidFill>
+                <a:latin typeface="Open Sans" pitchFamily="34" charset="0"/>
+                <a:ea typeface="Open Sans" pitchFamily="34" charset="-122"/>
+                <a:cs typeface="Open Sans" pitchFamily="34" charset="-120"/>
+              </a:rPr>
+              <a:t>Stage 1  |  Excel Onboarding  |  performance-ratios-template.xlsx</a:t>
+            </a:r>
+            <a:endParaRPr lang="en-US" sz="900" dirty="0"/>
+          </a:p>
+        </p:txBody>
+      </p:sp>
+      <p:sp>
+        <p:nvSpPr>
+          <p:cNvPr id="5" name="Text 3"/>
+          <p:cNvSpPr/>
+          <p:nvPr/>
+        </p:nvSpPr>
+        <p:spPr>
+          <a:xfrm>
+            <a:off x="731520" y="320040"/>
+            <a:ext cx="7680960" cy="457200"/>
+          </a:xfrm>
+          <a:prstGeom prst="rect">
+            <a:avLst/>
+          </a:prstGeom>
+          <a:noFill/>
+          <a:ln/>
+        </p:spPr>
+        <p:txBody>
+          <a:bodyPr wrap="square" lIns="0" tIns="0" rIns="0" bIns="0" rtlCol="0" anchor="ctr"/>
+          <a:lstStyle/>
+          <a:p>
+            <a:pPr marL="0" indent="0">
+              <a:buNone/>
+            </a:pPr>
+            <a:r>
+              <a:rPr lang="en-US" sz="2800" b="1" dirty="0">
+                <a:solidFill>
+                  <a:srgbClr val="FFFFFF"/>
+                </a:solidFill>
+                <a:latin typeface="Open Sans" pitchFamily="34" charset="0"/>
+                <a:ea typeface="Open Sans" pitchFamily="34" charset="-122"/>
+                <a:cs typeface="Open Sans" pitchFamily="34" charset="-120"/>
+              </a:rPr>
+              <a:t>Excel Tips Before You Build</a:t>
+            </a:r>
+            <a:endParaRPr lang="en-US" sz="2800" dirty="0"/>
+          </a:p>
+        </p:txBody>
+      </p:sp>
+      <p:sp>
+        <p:nvSpPr>
+          <p:cNvPr id="6" name="Text 4"/>
+          <p:cNvSpPr/>
+          <p:nvPr/>
+        </p:nvSpPr>
+        <p:spPr>
+          <a:xfrm>
+            <a:off x="731520" y="868680"/>
+            <a:ext cx="7680960" cy="548640"/>
+          </a:xfrm>
+          <a:prstGeom prst="rect">
+            <a:avLst/>
+          </a:prstGeom>
+          <a:noFill/>
+          <a:ln/>
+        </p:spPr>
+        <p:txBody>
+          <a:bodyPr wrap="square" lIns="0" tIns="0" rIns="0" bIns="0" rtlCol="0" anchor="ctr"/>
+          <a:lstStyle/>
+          <a:p>
+            <a:pPr marL="0" indent="0">
+              <a:lnSpc>
+                <a:spcPct val="130000"/>
+              </a:lnSpc>
+              <a:buNone/>
+            </a:pPr>
+            <a:r>
+              <a:rPr lang="en-US" sz="1300" dirty="0">
+                <a:solidFill>
+                  <a:srgbClr val="5A6B7A"/>
+                </a:solidFill>
+                <a:latin typeface="Open Sans" pitchFamily="34" charset="0"/>
+                <a:ea typeface="Open Sans" pitchFamily="34" charset="-122"/>
+                <a:cs typeface="Open Sans" pitchFamily="34" charset="-120"/>
+              </a:rPr>
+              <a:t xml:space="preserve">Three things to know before you populate the template at Stage 3 — they save hours and prevent the most common mistakes EMBA students hit on their first ratio build.</a:t>
+            </a:r>
+            <a:r>
+              <a:rPr lang="en-US" sz="1300" dirty="0" err="1">
+                <a:solidFill>
+                  <a:srgbClr val="5A6B7A"/>
+                </a:solidFill>
+                <a:latin typeface="Open Sans" pitchFamily="34" charset="0"/>
+                <a:ea typeface="Open Sans" pitchFamily="34" charset="-122"/>
+                <a:cs typeface="Open Sans" pitchFamily="34" charset="-120"/>
+              </a:rPr>
+              <a:t/>
+            </a:r>
+            <a:r>
+              <a:rPr lang="en-US" sz="1300" dirty="0">
+                <a:solidFill>
+                  <a:srgbClr val="5A6B7A"/>
+                </a:solidFill>
+                <a:latin typeface="Open Sans" pitchFamily="34" charset="0"/>
+                <a:ea typeface="Open Sans" pitchFamily="34" charset="-122"/>
+                <a:cs typeface="Open Sans" pitchFamily="34" charset="-120"/>
+              </a:rPr>
+              <a:t xml:space="preserve"/>
+            </a:r>
+            <a:endParaRPr lang="en-US" sz="1300" dirty="0"/>
+          </a:p>
+        </p:txBody>
+      </p:sp>
+      <p:sp>
+        <p:nvSpPr>
+          <p:cNvPr id="7" name="Shape 5"/>
+          <p:cNvSpPr/>
+          <p:nvPr/>
+        </p:nvSpPr>
+        <p:spPr>
+          <a:xfrm>
+            <a:off x="731520" y="1691640"/>
+            <a:ext cx="2377440" cy="2606040"/>
+          </a:xfrm>
+          <a:prstGeom prst="rect">
+            <a:avLst/>
+          </a:prstGeom>
+          <a:solidFill>
+            <a:srgbClr val="FFFFFF"/>
+          </a:solidFill>
+          <a:ln/>
+          <a:effectLst>
+            <a:outerShdw blurRad="76200" dist="25400" dir="8100000" algn="bl" rotWithShape="0">
+              <a:srgbClr val="000000">
+                <a:alpha val="8000"/>
+              </a:srgbClr>
+            </a:outerShdw>
+          </a:effectLst>
+        </p:spPr>
+        <p:txBody>
+          <a:bodyPr/>
+          <a:lstStyle/>
+          <a:p>
+            <a:endParaRPr lang="en-US"/>
+          </a:p>
+        </p:txBody>
+      </p:sp>
+      <p:pic>
+        <p:nvPicPr>
+          <p:cNvPr id="8" name="Image 0" descr="preencoded.png"/>
+          <p:cNvPicPr>
+            <a:picLocks noChangeAspect="1"/>
+          </p:cNvPicPr>
+          <p:nvPr/>
+        </p:nvPicPr>
+        <p:blipFill>
+          <a:blip r:embed="rId3"/>
+          <a:stretch>
+            <a:fillRect/>
+          </a:stretch>
+        </p:blipFill>
+        <p:spPr>
+          <a:xfrm>
+            <a:off x="1554480" y="1920240"/>
+            <a:ext cx="457200" cy="457200"/>
+          </a:xfrm>
+          <a:prstGeom prst="rect">
+            <a:avLst/>
+          </a:prstGeom>
+        </p:spPr>
+      </p:pic>
+      <p:sp>
+        <p:nvSpPr>
+          <p:cNvPr id="9" name="Text 6"/>
+          <p:cNvSpPr/>
+          <p:nvPr/>
+        </p:nvSpPr>
+        <p:spPr>
+          <a:xfrm>
+            <a:off x="868680" y="2514600"/>
+            <a:ext cx="2103120" cy="320040"/>
+          </a:xfrm>
+          <a:prstGeom prst="rect">
+            <a:avLst/>
+          </a:prstGeom>
+          <a:noFill/>
+          <a:ln/>
+        </p:spPr>
+        <p:txBody>
+          <a:bodyPr wrap="square" lIns="0" tIns="0" rIns="0" bIns="0" rtlCol="0" anchor="ctr"/>
+          <a:lstStyle/>
+          <a:p>
+            <a:pPr marL="0" indent="0" algn="ctr">
+              <a:buNone/>
+            </a:pPr>
+            <a:r>
+              <a:rPr lang="en-US" sz="1400" b="1" dirty="0">
+                <a:solidFill>
+                  <a:srgbClr val="1E2530"/>
+                </a:solidFill>
+                <a:latin typeface="Open Sans" pitchFamily="34" charset="0"/>
+                <a:ea typeface="Open Sans" pitchFamily="34" charset="-122"/>
+                <a:cs typeface="Open Sans" pitchFamily="34" charset="-120"/>
+              </a:rPr>
+              <a:t>Named Ranges</a:t>
+            </a:r>
+            <a:endParaRPr lang="en-US" sz="1400" dirty="0"/>
+          </a:p>
+        </p:txBody>
+      </p:sp>
+      <p:sp>
+        <p:nvSpPr>
+          <p:cNvPr id="10" name="Text 7"/>
+          <p:cNvSpPr/>
+          <p:nvPr/>
+        </p:nvSpPr>
+        <p:spPr>
+          <a:xfrm>
+            <a:off x="868680" y="2880360"/>
+            <a:ext cx="2103120" cy="1188720"/>
+          </a:xfrm>
+          <a:prstGeom prst="rect">
+            <a:avLst/>
+          </a:prstGeom>
+          <a:noFill/>
+          <a:ln/>
+        </p:spPr>
+        <p:txBody>
+          <a:bodyPr wrap="square" lIns="0" tIns="0" rIns="0" bIns="0" rtlCol="0" anchor="t"/>
+          <a:lstStyle/>
+          <a:p>
+            <a:pPr marL="0" indent="0" algn="ctr">
+              <a:lnSpc>
+                <a:spcPct val="140000"/>
+              </a:lnSpc>
+              <a:buNone/>
+            </a:pPr>
+            <a:r>
+              <a:rPr lang="en-US" sz="1100" dirty="0">
+                <a:solidFill>
+                  <a:srgbClr val="5A6B7A"/>
+                </a:solidFill>
+                <a:latin typeface="Open Sans" pitchFamily="34" charset="0"/>
+                <a:ea typeface="Open Sans" pitchFamily="34" charset="-122"/>
+                <a:cs typeface="Open Sans" pitchFamily="34" charset="-120"/>
+              </a:rPr>
+              <a:t>Type a name in the Name Box (top-left of the formula bar) to define one. Reference any cell by name in formulas instead of A1 notation.</a:t>
+            </a:r>
+            <a:endParaRPr lang="en-US" sz="1100" dirty="0"/>
+          </a:p>
+        </p:txBody>
+      </p:sp>
+      <p:sp>
+        <p:nvSpPr>
+          <p:cNvPr id="11" name="Shape 8"/>
+          <p:cNvSpPr/>
+          <p:nvPr/>
+        </p:nvSpPr>
+        <p:spPr>
+          <a:xfrm>
+            <a:off x="3383280" y="1691640"/>
+            <a:ext cx="2377440" cy="2606040"/>
+          </a:xfrm>
+          <a:prstGeom prst="rect">
+            <a:avLst/>
+          </a:prstGeom>
+          <a:solidFill>
+            <a:srgbClr val="FFFFFF"/>
+          </a:solidFill>
+          <a:ln/>
+          <a:effectLst>
+            <a:outerShdw blurRad="76200" dist="25400" dir="8100000" algn="bl" rotWithShape="0">
+              <a:srgbClr val="000000">
+                <a:alpha val="8000"/>
+              </a:srgbClr>
+            </a:outerShdw>
+          </a:effectLst>
+        </p:spPr>
+        <p:txBody>
+          <a:bodyPr/>
+          <a:lstStyle/>
+          <a:p>
+            <a:endParaRPr lang="en-US"/>
+          </a:p>
+        </p:txBody>
+      </p:sp>
+      <p:pic>
+        <p:nvPicPr>
+          <p:cNvPr id="12" name="Image 1" descr="preencoded.png"/>
+          <p:cNvPicPr>
+            <a:picLocks noChangeAspect="1"/>
+          </p:cNvPicPr>
+          <p:nvPr/>
+        </p:nvPicPr>
+        <p:blipFill>
+          <a:blip r:embed="rId4"/>
+          <a:stretch>
+            <a:fillRect/>
+          </a:stretch>
+        </p:blipFill>
+        <p:spPr>
+          <a:xfrm>
+            <a:off x="4206240" y="1920240"/>
+            <a:ext cx="457200" cy="457200"/>
+          </a:xfrm>
+          <a:prstGeom prst="rect">
+            <a:avLst/>
+          </a:prstGeom>
+        </p:spPr>
+      </p:pic>
+      <p:sp>
+        <p:nvSpPr>
+          <p:cNvPr id="13" name="Text 9"/>
+          <p:cNvSpPr/>
+          <p:nvPr/>
+        </p:nvSpPr>
+        <p:spPr>
+          <a:xfrm>
+            <a:off x="3520440" y="2514600"/>
+            <a:ext cx="2103120" cy="320040"/>
+          </a:xfrm>
+          <a:prstGeom prst="rect">
+            <a:avLst/>
+          </a:prstGeom>
+          <a:noFill/>
+          <a:ln/>
+        </p:spPr>
+        <p:txBody>
+          <a:bodyPr wrap="square" lIns="0" tIns="0" rIns="0" bIns="0" rtlCol="0" anchor="ctr"/>
+          <a:lstStyle/>
+          <a:p>
+            <a:pPr marL="0" indent="0" algn="ctr">
+              <a:buNone/>
+            </a:pPr>
+            <a:r>
+              <a:rPr lang="en-US" sz="1400" b="1" dirty="0">
+                <a:solidFill>
+                  <a:srgbClr val="1E2530"/>
+                </a:solidFill>
+                <a:latin typeface="Open Sans" pitchFamily="34" charset="0"/>
+                <a:ea typeface="Open Sans" pitchFamily="34" charset="-122"/>
+                <a:cs typeface="Open Sans" pitchFamily="34" charset="-120"/>
+              </a:rPr>
+              <a:t>Color Conventions</a:t>
+            </a:r>
+            <a:endParaRPr lang="en-US" sz="1400" dirty="0"/>
+          </a:p>
+        </p:txBody>
+      </p:sp>
+      <p:sp>
+        <p:nvSpPr>
+          <p:cNvPr id="14" name="Text 10"/>
+          <p:cNvSpPr/>
+          <p:nvPr/>
+        </p:nvSpPr>
+        <p:spPr>
+          <a:xfrm>
+            <a:off x="3520440" y="2880360"/>
+            <a:ext cx="2103120" cy="1188720"/>
+          </a:xfrm>
+          <a:prstGeom prst="rect">
+            <a:avLst/>
+          </a:prstGeom>
+          <a:noFill/>
+          <a:ln/>
+        </p:spPr>
+        <p:txBody>
+          <a:bodyPr wrap="square" lIns="0" tIns="0" rIns="0" bIns="0" rtlCol="0" anchor="t"/>
+          <a:lstStyle/>
+          <a:p>
+            <a:pPr marL="0" indent="0" algn="ctr">
+              <a:lnSpc>
+                <a:spcPct val="140000"/>
+              </a:lnSpc>
+              <a:buNone/>
+            </a:pPr>
+            <a:r>
+              <a:rPr lang="en-US" sz="1100" dirty="0">
+                <a:solidFill>
+                  <a:srgbClr val="5A6B7A"/>
+                </a:solidFill>
+                <a:latin typeface="Open Sans" pitchFamily="34" charset="0"/>
+                <a:ea typeface="Open Sans" pitchFamily="34" charset="-122"/>
+                <a:cs typeface="Open Sans" pitchFamily="34" charset="-120"/>
+              </a:rPr>
+              <a:t>Yellow = data inputs. Light blue = analyst assumptions. Green text = formulas (don't overwrite). Gray = computed ratio outputs.</a:t>
+            </a:r>
+            <a:endParaRPr lang="en-US" sz="1100" dirty="0"/>
+          </a:p>
+        </p:txBody>
+      </p:sp>
+      <p:sp>
+        <p:nvSpPr>
+          <p:cNvPr id="15" name="Shape 11"/>
+          <p:cNvSpPr/>
+          <p:nvPr/>
+        </p:nvSpPr>
+        <p:spPr>
+          <a:xfrm>
+            <a:off x="6035040" y="1691640"/>
+            <a:ext cx="2377440" cy="2606040"/>
+          </a:xfrm>
+          <a:prstGeom prst="rect">
+            <a:avLst/>
+          </a:prstGeom>
+          <a:solidFill>
+            <a:srgbClr val="FFFFFF"/>
+          </a:solidFill>
+          <a:ln/>
+          <a:effectLst>
+            <a:outerShdw blurRad="76200" dist="25400" dir="8100000" algn="bl" rotWithShape="0">
+              <a:srgbClr val="000000">
+                <a:alpha val="8000"/>
+              </a:srgbClr>
+            </a:outerShdw>
+          </a:effectLst>
+        </p:spPr>
+        <p:txBody>
+          <a:bodyPr/>
+          <a:lstStyle/>
+          <a:p>
+            <a:endParaRPr lang="en-US"/>
+          </a:p>
+        </p:txBody>
+      </p:sp>
+      <p:pic>
+        <p:nvPicPr>
+          <p:cNvPr id="16" name="Image 2" descr="preencoded.png"/>
+          <p:cNvPicPr>
+            <a:picLocks noChangeAspect="1"/>
+          </p:cNvPicPr>
+          <p:nvPr/>
+        </p:nvPicPr>
+        <p:blipFill>
+          <a:blip r:embed="rId5"/>
+          <a:stretch>
+            <a:fillRect/>
+          </a:stretch>
+        </p:blipFill>
+        <p:spPr>
+          <a:xfrm>
+            <a:off x="6858000" y="1920240"/>
+            <a:ext cx="457200" cy="457200"/>
+          </a:xfrm>
+          <a:prstGeom prst="rect">
+            <a:avLst/>
+          </a:prstGeom>
+        </p:spPr>
+      </p:pic>
+      <p:sp>
+        <p:nvSpPr>
+          <p:cNvPr id="17" name="Text 12"/>
+          <p:cNvSpPr/>
+          <p:nvPr/>
+        </p:nvSpPr>
+        <p:spPr>
+          <a:xfrm>
+            <a:off x="6172200" y="2514600"/>
+            <a:ext cx="2103120" cy="320040"/>
+          </a:xfrm>
+          <a:prstGeom prst="rect">
+            <a:avLst/>
+          </a:prstGeom>
+          <a:noFill/>
+          <a:ln/>
+        </p:spPr>
+        <p:txBody>
+          <a:bodyPr wrap="square" lIns="0" tIns="0" rIns="0" bIns="0" rtlCol="0" anchor="ctr"/>
+          <a:lstStyle/>
+          <a:p>
+            <a:pPr marL="0" indent="0" algn="ctr">
+              <a:buNone/>
+            </a:pPr>
+            <a:r>
+              <a:rPr lang="en-US" sz="1400" b="1" dirty="0">
+                <a:solidFill>
+                  <a:srgbClr val="1E2530"/>
+                </a:solidFill>
+                <a:latin typeface="Open Sans" pitchFamily="34" charset="0"/>
+                <a:ea typeface="Open Sans" pitchFamily="34" charset="-122"/>
+                <a:cs typeface="Open Sans" pitchFamily="34" charset="-120"/>
+              </a:rPr>
+              <a:t>Speed Keys</a:t>
+            </a:r>
+            <a:endParaRPr lang="en-US" sz="1400" dirty="0"/>
+          </a:p>
+        </p:txBody>
+      </p:sp>
+      <p:sp>
+        <p:nvSpPr>
+          <p:cNvPr id="18" name="Text 13"/>
+          <p:cNvSpPr/>
+          <p:nvPr/>
+        </p:nvSpPr>
+        <p:spPr>
+          <a:xfrm>
+            <a:off x="6172200" y="2880360"/>
+            <a:ext cx="2103120" cy="1188720"/>
+          </a:xfrm>
+          <a:prstGeom prst="rect">
+            <a:avLst/>
+          </a:prstGeom>
+          <a:noFill/>
+          <a:ln/>
+        </p:spPr>
+        <p:txBody>
+          <a:bodyPr wrap="square" lIns="0" tIns="0" rIns="0" bIns="0" rtlCol="0" anchor="t"/>
+          <a:lstStyle/>
+          <a:p>
+            <a:pPr marL="0" indent="0" algn="ctr">
+              <a:lnSpc>
+                <a:spcPct val="140000"/>
+              </a:lnSpc>
+              <a:buNone/>
+            </a:pPr>
+            <a:r>
+              <a:rPr lang="en-US" sz="1100" dirty="0">
+                <a:solidFill>
+                  <a:srgbClr val="5A6B7A"/>
+                </a:solidFill>
+                <a:latin typeface="Open Sans" pitchFamily="34" charset="0"/>
+                <a:ea typeface="Open Sans" pitchFamily="34" charset="-122"/>
+                <a:cs typeface="Open Sans" pitchFamily="34" charset="-120"/>
+              </a:rPr>
+              <a:t>F2 edits the active cell's formula. F4 cycles absolute/relative refs ($A$1 ↔ A1). Click any name in the Name Box to jump to it.</a:t>
+            </a:r>
+            <a:endParaRPr lang="en-US" sz="1100" dirty="0"/>
+          </a:p>
+        </p:txBody>
+      </p:sp>
+    </p:spTree>
+  </p:cSld>
+  <p:clrMapOvr>
+    <a:masterClrMapping/>
+  </p:clrMapOvr>
+</p:sld>
+</file>
+
+<file path=ppt/slides/slide23.xml><?xml version="1.0" encoding="utf-8"?>
+<p:sld xmlns:a="http://schemas.openxmlformats.org/drawingml/2006/main" xmlns:r="http://schemas.openxmlformats.org/officeDocument/2006/relationships" xmlns:p="http://schemas.openxmlformats.org/presentationml/2006/main">
+  <p:cSld>
+    <p:spTree>
+      <p:nvGrpSpPr>
+        <p:cNvPr id="1" name=""/>
+        <p:cNvGrpSpPr/>
+        <p:nvPr/>
+      </p:nvGrpSpPr>
+      <p:grpSpPr>
+        <a:xfrm>
+          <a:off x="0" y="0"/>
+          <a:ext cx="0" cy="0"/>
+          <a:chOff x="0" y="0"/>
+          <a:chExt cx="0" cy="0"/>
+        </a:xfrm>
+      </p:grpSpPr>
+      <p:sp>
+        <p:nvSpPr>
+          <p:cNvPr id="2" name="Shape 0"/>
+          <p:cNvSpPr/>
+          <p:nvPr/>
+        </p:nvSpPr>
+        <p:spPr>
+          <a:xfrm>
+            <a:off x="0" y="0"/>
+            <a:ext cx="9144000" cy="822960"/>
+          </a:xfrm>
+          <a:prstGeom prst="rect">
+            <a:avLst/>
+          </a:prstGeom>
+          <a:solidFill>
+            <a:srgbClr val="024731"/>
+          </a:solidFill>
+          <a:ln/>
+        </p:spPr>
+        <p:txBody>
+          <a:bodyPr/>
+          <a:lstStyle/>
+          <a:p>
+            <a:endParaRPr lang="en-US"/>
+          </a:p>
+        </p:txBody>
+      </p:sp>
+      <p:sp>
+        <p:nvSpPr>
+          <p:cNvPr id="3" name="Shape 1"/>
+          <p:cNvSpPr/>
+          <p:nvPr/>
+        </p:nvSpPr>
+        <p:spPr>
+          <a:xfrm>
+            <a:off x="0" y="4709160"/>
+            <a:ext cx="9144000" cy="434340"/>
+          </a:xfrm>
+          <a:prstGeom prst="rect">
+            <a:avLst/>
+          </a:prstGeom>
+          <a:solidFill>
+            <a:srgbClr val="36454F"/>
+          </a:solidFill>
+          <a:ln/>
+        </p:spPr>
+        <p:txBody>
+          <a:bodyPr/>
+          <a:lstStyle/>
+          <a:p>
+            <a:endParaRPr lang="en-US"/>
+          </a:p>
+        </p:txBody>
+      </p:sp>
+      <p:sp>
+        <p:nvSpPr>
+          <p:cNvPr id="4" name="Text 2"/>
+          <p:cNvSpPr/>
+          <p:nvPr/>
+        </p:nvSpPr>
+        <p:spPr>
+          <a:xfrm>
+            <a:off x="457200" y="4754880"/>
+            <a:ext cx="8229600" cy="320040"/>
+          </a:xfrm>
+          <a:prstGeom prst="rect">
+            <a:avLst/>
+          </a:prstGeom>
+          <a:noFill/>
+          <a:ln/>
+        </p:spPr>
+        <p:txBody>
+          <a:bodyPr wrap="square" rtlCol="0" anchor="ctr"/>
+          <a:lstStyle/>
+          <a:p>
+            <a:pPr marL="0" indent="0" algn="ctr">
+              <a:buNone/>
+            </a:pPr>
+            <a:r>
+              <a:rPr lang="en-US" sz="900" dirty="0">
+                <a:solidFill>
+                  <a:srgbClr val="8A9BAD"/>
+                </a:solidFill>
+                <a:latin typeface="Open Sans" pitchFamily="34" charset="0"/>
+                <a:ea typeface="Open Sans" pitchFamily="34" charset="-122"/>
+                <a:cs typeface="Open Sans" pitchFamily="34" charset="-120"/>
+              </a:rPr>
+              <a:t>Appendix  |  Repo Hygiene  |  .gitignore lives at your repo root</a:t>
+            </a:r>
+            <a:endParaRPr lang="en-US" sz="900" dirty="0"/>
+          </a:p>
+        </p:txBody>
+      </p:sp>
+      <p:sp>
+        <p:nvSpPr>
+          <p:cNvPr id="5" name="Text 3"/>
+          <p:cNvSpPr/>
+          <p:nvPr/>
+        </p:nvSpPr>
+        <p:spPr>
+          <a:xfrm>
+            <a:off x="731520" y="320040"/>
+            <a:ext cx="7680960" cy="457200"/>
+          </a:xfrm>
+          <a:prstGeom prst="rect">
+            <a:avLst/>
+          </a:prstGeom>
+          <a:noFill/>
+          <a:ln/>
+        </p:spPr>
+        <p:txBody>
+          <a:bodyPr wrap="square" lIns="0" tIns="0" rIns="0" bIns="0" rtlCol="0" anchor="ctr"/>
+          <a:lstStyle/>
+          <a:p>
+            <a:pPr marL="0" indent="0">
+              <a:buNone/>
+            </a:pPr>
+            <a:r>
+              <a:rPr lang="en-US" sz="2800" b="1" dirty="0">
+                <a:solidFill>
+                  <a:srgbClr val="FFFFFF"/>
+                </a:solidFill>
+                <a:latin typeface="Open Sans" pitchFamily="34" charset="0"/>
+                <a:ea typeface="Open Sans" pitchFamily="34" charset="-122"/>
+                <a:cs typeface="Open Sans" pitchFamily="34" charset="-120"/>
+              </a:rPr>
+              <a:t>.gitignore — Keep Junk Out of Your Repo</a:t>
+            </a:r>
+            <a:endParaRPr lang="en-US" sz="2800" dirty="0"/>
+          </a:p>
+        </p:txBody>
+      </p:sp>
+      <p:sp>
+        <p:nvSpPr>
+          <p:cNvPr id="6" name="Text 4"/>
+          <p:cNvSpPr/>
+          <p:nvPr/>
+        </p:nvSpPr>
+        <p:spPr>
+          <a:xfrm>
+            <a:off x="731520" y="868680"/>
+            <a:ext cx="7680960" cy="548640"/>
+          </a:xfrm>
+          <a:prstGeom prst="rect">
+            <a:avLst/>
+          </a:prstGeom>
+          <a:noFill/>
+          <a:ln/>
+        </p:spPr>
+        <p:txBody>
+          <a:bodyPr wrap="square" lIns="0" tIns="0" rIns="0" bIns="0" rtlCol="0" anchor="ctr"/>
+          <a:lstStyle/>
+          <a:p>
+            <a:pPr marL="0" indent="0">
+              <a:lnSpc>
+                <a:spcPct val="130000"/>
+              </a:lnSpc>
+              <a:buNone/>
+            </a:pPr>
+            <a:r>
+              <a:rPr lang="en-US" sz="1300" dirty="0">
+                <a:solidFill>
+                  <a:srgbClr val="5A6B7A"/>
+                </a:solidFill>
+                <a:latin typeface="Open Sans" pitchFamily="34" charset="0"/>
+                <a:ea typeface="Open Sans" pitchFamily="34" charset="-122"/>
+                <a:cs typeface="Open Sans" pitchFamily="34" charset="-120"/>
+              </a:rPr>
+              <a:t xml:space="preserve">A .gitignore file at your repo root tells Git which files to ignore. Without one, your repo collects OS junk, Excel lock files, and (worst case) credentials. Use the course template as a starting point.</a:t>
+            </a:r>
+            <a:r>
+              <a:rPr lang="en-US" sz="1300" dirty="0" err="1">
+                <a:solidFill>
+                  <a:srgbClr val="5A6B7A"/>
+                </a:solidFill>
+                <a:latin typeface="Open Sans" pitchFamily="34" charset="0"/>
+                <a:ea typeface="Open Sans" pitchFamily="34" charset="-122"/>
+                <a:cs typeface="Open Sans" pitchFamily="34" charset="-120"/>
+              </a:rPr>
+              <a:t/>
+            </a:r>
+            <a:r>
+              <a:rPr lang="en-US" sz="1300" dirty="0">
+                <a:solidFill>
+                  <a:srgbClr val="5A6B7A"/>
+                </a:solidFill>
+                <a:latin typeface="Open Sans" pitchFamily="34" charset="0"/>
+                <a:ea typeface="Open Sans" pitchFamily="34" charset="-122"/>
+                <a:cs typeface="Open Sans" pitchFamily="34" charset="-120"/>
+              </a:rPr>
+              <a:t xml:space="preserve"/>
+            </a:r>
+            <a:endParaRPr lang="en-US" sz="1300" dirty="0"/>
+          </a:p>
+        </p:txBody>
+      </p:sp>
+      <p:sp>
+        <p:nvSpPr>
+          <p:cNvPr id="7" name="Shape 5"/>
+          <p:cNvSpPr/>
+          <p:nvPr/>
+        </p:nvSpPr>
+        <p:spPr>
+          <a:xfrm>
+            <a:off x="731520" y="1691640"/>
+            <a:ext cx="2377440" cy="2606040"/>
+          </a:xfrm>
+          <a:prstGeom prst="rect">
+            <a:avLst/>
+          </a:prstGeom>
+          <a:solidFill>
+            <a:srgbClr val="FFFFFF"/>
+          </a:solidFill>
+          <a:ln/>
+          <a:effectLst>
+            <a:outerShdw blurRad="76200" dist="25400" dir="8100000" algn="bl" rotWithShape="0">
+              <a:srgbClr val="000000">
+                <a:alpha val="8000"/>
+              </a:srgbClr>
+            </a:outerShdw>
+          </a:effectLst>
+        </p:spPr>
+        <p:txBody>
+          <a:bodyPr/>
+          <a:lstStyle/>
+          <a:p>
+            <a:endParaRPr lang="en-US"/>
+          </a:p>
+        </p:txBody>
+      </p:sp>
+      <p:pic>
+        <p:nvPicPr>
+          <p:cNvPr id="8" name="Image 0" descr="preencoded.png"/>
+          <p:cNvPicPr>
+            <a:picLocks noChangeAspect="1"/>
+          </p:cNvPicPr>
+          <p:nvPr/>
+        </p:nvPicPr>
+        <p:blipFill>
+          <a:blip r:embed="rId3"/>
+          <a:stretch>
+            <a:fillRect/>
+          </a:stretch>
+        </p:blipFill>
+        <p:spPr>
+          <a:xfrm>
+            <a:off x="1554480" y="1920240"/>
+            <a:ext cx="457200" cy="457200"/>
+          </a:xfrm>
+          <a:prstGeom prst="rect">
+            <a:avLst/>
+          </a:prstGeom>
+        </p:spPr>
+      </p:pic>
+      <p:sp>
+        <p:nvSpPr>
+          <p:cNvPr id="9" name="Text 6"/>
+          <p:cNvSpPr/>
+          <p:nvPr/>
+        </p:nvSpPr>
+        <p:spPr>
+          <a:xfrm>
+            <a:off x="868680" y="2514600"/>
+            <a:ext cx="2103120" cy="320040"/>
+          </a:xfrm>
+          <a:prstGeom prst="rect">
+            <a:avLst/>
+          </a:prstGeom>
+          <a:noFill/>
+          <a:ln/>
+        </p:spPr>
+        <p:txBody>
+          <a:bodyPr wrap="square" lIns="0" tIns="0" rIns="0" bIns="0" rtlCol="0" anchor="ctr"/>
+          <a:lstStyle/>
+          <a:p>
+            <a:pPr marL="0" indent="0" algn="ctr">
+              <a:buNone/>
+            </a:pPr>
+            <a:r>
+              <a:rPr lang="en-US" sz="1400" b="1" dirty="0">
+                <a:solidFill>
+                  <a:srgbClr val="1E2530"/>
+                </a:solidFill>
+                <a:latin typeface="Open Sans" pitchFamily="34" charset="0"/>
+                <a:ea typeface="Open Sans" pitchFamily="34" charset="-122"/>
+                <a:cs typeface="Open Sans" pitchFamily="34" charset="-120"/>
+              </a:rPr>
+              <a:t>OS Junk Files</a:t>
+            </a:r>
+            <a:endParaRPr lang="en-US" sz="1400" dirty="0"/>
+          </a:p>
+        </p:txBody>
+      </p:sp>
+      <p:sp>
+        <p:nvSpPr>
+          <p:cNvPr id="10" name="Text 7"/>
+          <p:cNvSpPr/>
+          <p:nvPr/>
+        </p:nvSpPr>
+        <p:spPr>
+          <a:xfrm>
+            <a:off x="868680" y="2880360"/>
+            <a:ext cx="2103120" cy="1188720"/>
+          </a:xfrm>
+          <a:prstGeom prst="rect">
+            <a:avLst/>
+          </a:prstGeom>
+          <a:noFill/>
+          <a:ln/>
+        </p:spPr>
+        <p:txBody>
+          <a:bodyPr wrap="square" lIns="0" tIns="0" rIns="0" bIns="0" rtlCol="0" anchor="t"/>
+          <a:lstStyle/>
+          <a:p>
+            <a:pPr marL="0" indent="0" algn="ctr">
+              <a:lnSpc>
+                <a:spcPct val="140000"/>
+              </a:lnSpc>
+              <a:buNone/>
+            </a:pPr>
+            <a:r>
+              <a:rPr lang="en-US" sz="1100" dirty="0">
+                <a:solidFill>
+                  <a:srgbClr val="5A6B7A"/>
+                </a:solidFill>
+                <a:latin typeface="Open Sans" pitchFamily="34" charset="0"/>
+                <a:ea typeface="Open Sans" pitchFamily="34" charset="-122"/>
+                <a:cs typeface="Open Sans" pitchFamily="34" charset="-120"/>
+              </a:rPr>
+              <a:t>.DS_Store (macOS), Thumbs.db (Windows), desktop.ini. Useless to anyone but your OS — never commit them.</a:t>
+            </a:r>
+            <a:endParaRPr lang="en-US" sz="1100" dirty="0"/>
+          </a:p>
+        </p:txBody>
+      </p:sp>
+      <p:sp>
+        <p:nvSpPr>
+          <p:cNvPr id="11" name="Shape 8"/>
+          <p:cNvSpPr/>
+          <p:nvPr/>
+        </p:nvSpPr>
+        <p:spPr>
+          <a:xfrm>
+            <a:off x="3383280" y="1691640"/>
+            <a:ext cx="2377440" cy="2606040"/>
+          </a:xfrm>
+          <a:prstGeom prst="rect">
+            <a:avLst/>
+          </a:prstGeom>
+          <a:solidFill>
+            <a:srgbClr val="FFFFFF"/>
+          </a:solidFill>
+          <a:ln/>
+          <a:effectLst>
+            <a:outerShdw blurRad="76200" dist="25400" dir="8100000" algn="bl" rotWithShape="0">
+              <a:srgbClr val="000000">
+                <a:alpha val="8000"/>
+              </a:srgbClr>
+            </a:outerShdw>
+          </a:effectLst>
+        </p:spPr>
+        <p:txBody>
+          <a:bodyPr/>
+          <a:lstStyle/>
+          <a:p>
+            <a:endParaRPr lang="en-US"/>
+          </a:p>
+        </p:txBody>
+      </p:sp>
+      <p:pic>
+        <p:nvPicPr>
+          <p:cNvPr id="12" name="Image 1" descr="preencoded.png"/>
+          <p:cNvPicPr>
+            <a:picLocks noChangeAspect="1"/>
+          </p:cNvPicPr>
+          <p:nvPr/>
+        </p:nvPicPr>
+        <p:blipFill>
+          <a:blip r:embed="rId4"/>
+          <a:stretch>
+            <a:fillRect/>
+          </a:stretch>
+        </p:blipFill>
+        <p:spPr>
+          <a:xfrm>
+            <a:off x="4206240" y="1920240"/>
+            <a:ext cx="457200" cy="457200"/>
+          </a:xfrm>
+          <a:prstGeom prst="rect">
+            <a:avLst/>
+          </a:prstGeom>
+        </p:spPr>
+      </p:pic>
+      <p:sp>
+        <p:nvSpPr>
+          <p:cNvPr id="13" name="Text 9"/>
+          <p:cNvSpPr/>
+          <p:nvPr/>
+        </p:nvSpPr>
+        <p:spPr>
+          <a:xfrm>
+            <a:off x="3520440" y="2514600"/>
+            <a:ext cx="2103120" cy="320040"/>
+          </a:xfrm>
+          <a:prstGeom prst="rect">
+            <a:avLst/>
+          </a:prstGeom>
+          <a:noFill/>
+          <a:ln/>
+        </p:spPr>
+        <p:txBody>
+          <a:bodyPr wrap="square" lIns="0" tIns="0" rIns="0" bIns="0" rtlCol="0" anchor="ctr"/>
+          <a:lstStyle/>
+          <a:p>
+            <a:pPr marL="0" indent="0" algn="ctr">
+              <a:buNone/>
+            </a:pPr>
+            <a:r>
+              <a:rPr lang="en-US" sz="1400" b="1" dirty="0">
+                <a:solidFill>
+                  <a:srgbClr val="1E2530"/>
+                </a:solidFill>
+                <a:latin typeface="Open Sans" pitchFamily="34" charset="0"/>
+                <a:ea typeface="Open Sans" pitchFamily="34" charset="-122"/>
+                <a:cs typeface="Open Sans" pitchFamily="34" charset="-120"/>
+              </a:rPr>
+              <a:t>Office Lock Files</a:t>
+            </a:r>
+            <a:endParaRPr lang="en-US" sz="1400" dirty="0"/>
+          </a:p>
+        </p:txBody>
+      </p:sp>
+      <p:sp>
+        <p:nvSpPr>
+          <p:cNvPr id="14" name="Text 10"/>
+          <p:cNvSpPr/>
+          <p:nvPr/>
+        </p:nvSpPr>
+        <p:spPr>
+          <a:xfrm>
+            <a:off x="3520440" y="2880360"/>
+            <a:ext cx="2103120" cy="1188720"/>
+          </a:xfrm>
+          <a:prstGeom prst="rect">
+            <a:avLst/>
+          </a:prstGeom>
+          <a:noFill/>
+          <a:ln/>
+        </p:spPr>
+        <p:txBody>
+          <a:bodyPr wrap="square" lIns="0" tIns="0" rIns="0" bIns="0" rtlCol="0" anchor="t"/>
+          <a:lstStyle/>
+          <a:p>
+            <a:pPr marL="0" indent="0" algn="ctr">
+              <a:lnSpc>
+                <a:spcPct val="140000"/>
+              </a:lnSpc>
+              <a:buNone/>
+            </a:pPr>
+            <a:r>
+              <a:rPr lang="en-US" sz="1100" dirty="0">
+                <a:solidFill>
+                  <a:srgbClr val="5A6B7A"/>
+                </a:solidFill>
+                <a:latin typeface="Open Sans" pitchFamily="34" charset="0"/>
+                <a:ea typeface="Open Sans" pitchFamily="34" charset="-122"/>
+                <a:cs typeface="Open Sans" pitchFamily="34" charset="-120"/>
+              </a:rPr>
+              <a:t>~$*.xlsx, ~$*.docx — created when Excel/Word has a file open. Commits will fail until you close the file. Just ignore them.</a:t>
+            </a:r>
+            <a:endParaRPr lang="en-US" sz="1100" dirty="0"/>
+          </a:p>
+        </p:txBody>
+      </p:sp>
+      <p:sp>
+        <p:nvSpPr>
+          <p:cNvPr id="15" name="Shape 11"/>
+          <p:cNvSpPr/>
+          <p:nvPr/>
+        </p:nvSpPr>
+        <p:spPr>
+          <a:xfrm>
+            <a:off x="6035040" y="1691640"/>
+            <a:ext cx="2377440" cy="2606040"/>
+          </a:xfrm>
+          <a:prstGeom prst="rect">
+            <a:avLst/>
+          </a:prstGeom>
+          <a:solidFill>
+            <a:srgbClr val="FFFFFF"/>
+          </a:solidFill>
+          <a:ln/>
+          <a:effectLst>
+            <a:outerShdw blurRad="76200" dist="25400" dir="8100000" algn="bl" rotWithShape="0">
+              <a:srgbClr val="000000">
+                <a:alpha val="8000"/>
+              </a:srgbClr>
+            </a:outerShdw>
+          </a:effectLst>
+        </p:spPr>
+        <p:txBody>
+          <a:bodyPr/>
+          <a:lstStyle/>
+          <a:p>
+            <a:endParaRPr lang="en-US"/>
+          </a:p>
+        </p:txBody>
+      </p:sp>
+      <p:pic>
+        <p:nvPicPr>
+          <p:cNvPr id="16" name="Image 2" descr="preencoded.png"/>
+          <p:cNvPicPr>
+            <a:picLocks noChangeAspect="1"/>
+          </p:cNvPicPr>
+          <p:nvPr/>
+        </p:nvPicPr>
+        <p:blipFill>
+          <a:blip r:embed="rId5"/>
+          <a:stretch>
+            <a:fillRect/>
+          </a:stretch>
+        </p:blipFill>
+        <p:spPr>
+          <a:xfrm>
+            <a:off x="6858000" y="1920240"/>
+            <a:ext cx="457200" cy="457200"/>
+          </a:xfrm>
+          <a:prstGeom prst="rect">
+            <a:avLst/>
+          </a:prstGeom>
+        </p:spPr>
+      </p:pic>
+      <p:sp>
+        <p:nvSpPr>
+          <p:cNvPr id="17" name="Text 12"/>
+          <p:cNvSpPr/>
+          <p:nvPr/>
+        </p:nvSpPr>
+        <p:spPr>
+          <a:xfrm>
+            <a:off x="6172200" y="2514600"/>
+            <a:ext cx="2103120" cy="320040"/>
+          </a:xfrm>
+          <a:prstGeom prst="rect">
+            <a:avLst/>
+          </a:prstGeom>
+          <a:noFill/>
+          <a:ln/>
+        </p:spPr>
+        <p:txBody>
+          <a:bodyPr wrap="square" lIns="0" tIns="0" rIns="0" bIns="0" rtlCol="0" anchor="ctr"/>
+          <a:lstStyle/>
+          <a:p>
+            <a:pPr marL="0" indent="0" algn="ctr">
+              <a:buNone/>
+            </a:pPr>
+            <a:r>
+              <a:rPr lang="en-US" sz="1400" b="1" dirty="0">
+                <a:solidFill>
+                  <a:srgbClr val="1E2530"/>
+                </a:solidFill>
+                <a:latin typeface="Open Sans" pitchFamily="34" charset="0"/>
+                <a:ea typeface="Open Sans" pitchFamily="34" charset="-122"/>
+                <a:cs typeface="Open Sans" pitchFamily="34" charset="-120"/>
+              </a:rPr>
+              <a:t>Secrets &amp; Credentials</a:t>
+            </a:r>
+            <a:endParaRPr lang="en-US" sz="1400" dirty="0"/>
+          </a:p>
+        </p:txBody>
+      </p:sp>
+      <p:sp>
+        <p:nvSpPr>
+          <p:cNvPr id="18" name="Text 13"/>
+          <p:cNvSpPr/>
+          <p:nvPr/>
+        </p:nvSpPr>
+        <p:spPr>
+          <a:xfrm>
+            <a:off x="6172200" y="2880360"/>
+            <a:ext cx="2103120" cy="1188720"/>
+          </a:xfrm>
+          <a:prstGeom prst="rect">
+            <a:avLst/>
+          </a:prstGeom>
+          <a:noFill/>
+          <a:ln/>
+        </p:spPr>
+        <p:txBody>
+          <a:bodyPr wrap="square" lIns="0" tIns="0" rIns="0" bIns="0" rtlCol="0" anchor="t"/>
+          <a:lstStyle/>
+          <a:p>
+            <a:pPr marL="0" indent="0" algn="ctr">
+              <a:lnSpc>
+                <a:spcPct val="140000"/>
+              </a:lnSpc>
+              <a:buNone/>
+            </a:pPr>
+            <a:r>
+              <a:rPr lang="en-US" sz="1100" dirty="0">
+                <a:solidFill>
+                  <a:srgbClr val="5A6B7A"/>
+                </a:solidFill>
+                <a:latin typeface="Open Sans" pitchFamily="34" charset="0"/>
+                <a:ea typeface="Open Sans" pitchFamily="34" charset="-122"/>
+                <a:cs typeface="Open Sans" pitchFamily="34" charset="-120"/>
+              </a:rPr>
+              <a:t>.env files, *.key, anything containing API keys or passwords. Once committed publicly, treat them as compromised — rotate.</a:t>
             </a:r>
             <a:endParaRPr lang="en-US" sz="1100" dirty="0"/>
           </a:p>
@@ -21231,13 +22509,13 @@
         <p:spPr>
           <a:xfrm>
             <a:off x="0" y="0"/>
-            <a:ext cx="9144000" cy="36576"/>
+            <a:ext cx="9144000" cy="822960"/>
           </a:xfrm>
           <a:prstGeom prst="rect">
             <a:avLst/>
           </a:prstGeom>
           <a:solidFill>
-            <a:srgbClr val="B8975C"/>
+            <a:srgbClr val="024731"/>
           </a:solidFill>
           <a:ln/>
         </p:spPr>
@@ -21342,7 +22620,7 @@
             <a:r>
               <a:rPr lang="en-US" sz="2800" b="1" dirty="0">
                 <a:solidFill>
-                  <a:srgbClr val="1E2530"/>
+                  <a:srgbClr val="FFFFFF"/>
                 </a:solidFill>
                 <a:latin typeface="Open Sans" pitchFamily="34" charset="0"/>
                 <a:ea typeface="Open Sans" pitchFamily="34" charset="-122"/>
@@ -22918,13 +24196,13 @@
         <p:spPr>
           <a:xfrm>
             <a:off x="0" y="0"/>
-            <a:ext cx="9144000" cy="36576"/>
+            <a:ext cx="9144000" cy="640080"/>
           </a:xfrm>
           <a:prstGeom prst="rect">
             <a:avLst/>
           </a:prstGeom>
           <a:solidFill>
-            <a:srgbClr val="B8975C"/>
+            <a:srgbClr val="024731"/>
           </a:solidFill>
           <a:ln/>
         </p:spPr>
@@ -23871,13 +25149,13 @@
         <p:spPr>
           <a:xfrm>
             <a:off x="0" y="0"/>
-            <a:ext cx="9144000" cy="36576"/>
+            <a:ext cx="9144000" cy="640080"/>
           </a:xfrm>
           <a:prstGeom prst="rect">
             <a:avLst/>
           </a:prstGeom>
           <a:solidFill>
-            <a:srgbClr val="B8975C"/>
+            <a:srgbClr val="024731"/>
           </a:solidFill>
           <a:ln/>
         </p:spPr>

--- a/courses/BUS-629-VEMBA-International-Corporate-Finance/BUS629_AI_Ratios_Project.pptx
+++ b/courses/BUS-629-VEMBA-International-Corporate-Finance/BUS629_AI_Ratios_Project.pptx
@@ -59,6 +59,10 @@
     <p:sldId id="353" r:id="rId50"/>
     <p:sldId id="355" r:id="rId51"/>
     <p:sldId id="354" r:id="rId52"/>
+    <p:sldId id="356" r:id="rId58"/>
+    <p:sldId id="357" r:id="rId59"/>
+    <p:sldId id="358" r:id="rId60"/>
+    <p:sldId id="359" r:id="rId61"/>
   </p:sldIdLst>
   <p:sldSz cx="9144000" cy="5143500" type="screen16x9"/>
   <p:notesSz cx="5143500" cy="9144000"/>
@@ -18256,7 +18260,7 @@
                 <a:ea typeface="Open Sans" pitchFamily="34" charset="-122"/>
                 <a:cs typeface="Open Sans" pitchFamily="34" charset="-120"/>
               </a:rPr>
-              <a:t>    saved to models/builds/</a:t>
+              <a:t xml:space="preserve">    saved to models/builds/</a:t>
             </a:r>
             <a:endParaRPr lang="en-US" sz="1100" dirty="0"/>
           </a:p>
@@ -18339,7 +18343,7 @@
                 <a:ea typeface="Open Sans" pitchFamily="34" charset="-122"/>
                 <a:cs typeface="Open Sans" pitchFamily="34" charset="-120"/>
               </a:rPr>
-              <a:t>    source URL, standard, currency, FYE</a:t>
+              <a:t xml:space="preserve">    source URL, standard, currency, FYE</a:t>
             </a:r>
             <a:endParaRPr lang="en-US" sz="1100" dirty="0"/>
           </a:p>
@@ -18943,7 +18947,7 @@
                 <a:ea typeface="Open Sans" pitchFamily="34" charset="-122"/>
                 <a:cs typeface="Open Sans" pitchFamily="34" charset="-120"/>
               </a:rPr>
-              <a:t>This stage builds the foundation for the Financial Statement analysis you will perform in </a:t>
+              <a:t xml:space="preserve">This stage builds the foundation for the Financial Statement analysis you will perform in </a:t>
             </a:r>
             <a:r>
               <a:rPr lang="en-US" sz="1000">
@@ -20322,7 +20326,7 @@
                 <a:ea typeface="Open Sans" pitchFamily="34" charset="-122"/>
                 <a:cs typeface="Open Sans" pitchFamily="34" charset="-120"/>
               </a:rPr>
-              <a:t>Ratio </a:t>
+              <a:t xml:space="preserve">Ratio </a:t>
             </a:r>
             <a:r>
               <a:rPr lang="en-US" sz="4000" b="1">
@@ -25889,7 +25893,7 @@
                 <a:ea typeface="Open Sans" pitchFamily="34" charset="-122"/>
                 <a:cs typeface="Open Sans" pitchFamily="34" charset="-120"/>
               </a:rPr>
-              <a:t>  — Instructor</a:t>
+              <a:t xml:space="preserve">  — Instructor</a:t>
             </a:r>
             <a:endParaRPr lang="en-US" sz="1000" dirty="0"/>
           </a:p>
@@ -43959,6 +43963,3201 @@
 </p:sld>
 </file>
 
+<file path=ppt/slides/slide52.xml><?xml version="1.0" encoding="utf-8"?>
+<p:sld xmlns:a="http://schemas.openxmlformats.org/drawingml/2006/main" xmlns:r="http://schemas.openxmlformats.org/officeDocument/2006/relationships" xmlns:p="http://schemas.openxmlformats.org/presentationml/2006/main">
+  <p:cSld>
+    <p:spTree>
+      <p:nvGrpSpPr>
+        <p:cNvPr id="1" name="">
+          <a:extLst>
+            <a:ext uri="{FF2B5EF4-FFF2-40B4-BE49-F238E27FC236}">
+              <a16:creationId xmlns:a16="http://schemas.microsoft.com/office/drawing/2014/main" id="{86D8C8A8-8564-943A-0CE2-B9EAD893FFB0}"/>
+            </a:ext>
+          </a:extLst>
+        </p:cNvPr>
+        <p:cNvGrpSpPr/>
+        <p:nvPr/>
+      </p:nvGrpSpPr>
+      <p:grpSpPr>
+        <a:xfrm>
+          <a:off x="0" y="0"/>
+          <a:ext cx="0" cy="0"/>
+          <a:chOff x="0" y="0"/>
+          <a:chExt cx="0" cy="0"/>
+        </a:xfrm>
+      </p:grpSpPr>
+      <p:sp>
+        <p:nvSpPr>
+          <p:cNvPr id="2" name="Shape 0">
+            <a:extLst>
+              <a:ext uri="{FF2B5EF4-FFF2-40B4-BE49-F238E27FC236}">
+                <a16:creationId xmlns:a16="http://schemas.microsoft.com/office/drawing/2014/main" id="{0053C377-5E53-F9E8-A27F-0C516CF4EE5A}"/>
+              </a:ext>
+            </a:extLst>
+          </p:cNvPr>
+          <p:cNvSpPr/>
+          <p:nvPr/>
+        </p:nvSpPr>
+        <p:spPr>
+          <a:xfrm>
+            <a:off x="0" y="0"/>
+            <a:ext cx="9144000" cy="36576"/>
+          </a:xfrm>
+          <a:prstGeom prst="rect">
+            <a:avLst/>
+          </a:prstGeom>
+          <a:solidFill>
+            <a:srgbClr val="B8975C"/>
+          </a:solidFill>
+          <a:ln/>
+        </p:spPr>
+        <p:txBody>
+          <a:bodyPr/>
+          <a:lstStyle/>
+          <a:p>
+            <a:endParaRPr lang="en-US"/>
+          </a:p>
+        </p:txBody>
+      </p:sp>
+      <p:sp>
+        <p:nvSpPr>
+          <p:cNvPr id="3" name="Text 1">
+            <a:extLst>
+              <a:ext uri="{FF2B5EF4-FFF2-40B4-BE49-F238E27FC236}">
+                <a16:creationId xmlns:a16="http://schemas.microsoft.com/office/drawing/2014/main" id="{FB49E700-5A07-CB8D-CD15-D0780F2BA747}"/>
+              </a:ext>
+            </a:extLst>
+          </p:cNvPr>
+          <p:cNvSpPr/>
+          <p:nvPr/>
+        </p:nvSpPr>
+        <p:spPr>
+          <a:xfrm>
+            <a:off x="731520" y="548640"/>
+            <a:ext cx="7680960" cy="365760"/>
+          </a:xfrm>
+          <a:prstGeom prst="rect">
+            <a:avLst/>
+          </a:prstGeom>
+          <a:noFill/>
+          <a:ln/>
+        </p:spPr>
+        <p:txBody>
+          <a:bodyPr wrap="square" lIns="0" tIns="0" rIns="0" bIns="0" rtlCol="0" anchor="ctr"/>
+          <a:lstStyle/>
+          <a:p>
+            <a:pPr marL="0" indent="0">
+              <a:buNone/>
+            </a:pPr>
+            <a:r>
+              <a:rPr lang="en-US" sz="1400" b="1" kern="0" spc="600" dirty="0">
+                <a:solidFill>
+                  <a:srgbClr val="B8975C"/>
+                </a:solidFill>
+                <a:latin typeface="Open Sans" pitchFamily="34" charset="0"/>
+                <a:ea typeface="Open Sans" pitchFamily="34" charset="-122"/>
+                <a:cs typeface="Open Sans" pitchFamily="34" charset="-120"/>
+              </a:rPr>
+              <a:t>APPENDIX C</a:t>
+            </a:r>
+            <a:endParaRPr lang="en-US" sz="1400" dirty="0"/>
+          </a:p>
+        </p:txBody>
+      </p:sp>
+      <p:sp>
+        <p:nvSpPr>
+          <p:cNvPr id="4" name="Text 2">
+            <a:extLst>
+              <a:ext uri="{FF2B5EF4-FFF2-40B4-BE49-F238E27FC236}">
+                <a16:creationId xmlns:a16="http://schemas.microsoft.com/office/drawing/2014/main" id="{F54F229D-F05E-B476-5B3E-4BBC55431E5F}"/>
+              </a:ext>
+            </a:extLst>
+          </p:cNvPr>
+          <p:cNvSpPr/>
+          <p:nvPr/>
+        </p:nvSpPr>
+        <p:spPr>
+          <a:xfrm>
+            <a:off x="731520" y="1097280"/>
+            <a:ext cx="7680960" cy="1828800"/>
+          </a:xfrm>
+          <a:prstGeom prst="rect">
+            <a:avLst/>
+          </a:prstGeom>
+          <a:noFill/>
+          <a:ln/>
+        </p:spPr>
+        <p:txBody>
+          <a:bodyPr wrap="square" lIns="0" tIns="0" rIns="0" bIns="0" rtlCol="0" anchor="ctr"/>
+          <a:lstStyle/>
+          <a:p>
+            <a:pPr marL="0" indent="0">
+              <a:lnSpc>
+                <a:spcPct val="110000"/>
+              </a:lnSpc>
+              <a:buNone/>
+            </a:pPr>
+            <a:r>
+              <a:rPr lang="en-US" sz="4000" b="1" dirty="0">
+                <a:solidFill>
+                  <a:schemeClr val="accent6">
+                    <a:lumMod val="50000"/>
+                  </a:schemeClr>
+                </a:solidFill>
+                <a:latin typeface="Open Sans" pitchFamily="34" charset="0"/>
+                <a:ea typeface="Open Sans" pitchFamily="34" charset="-122"/>
+                <a:cs typeface="Open Sans" pitchFamily="34" charset="-120"/>
+              </a:rPr>
+              <a:t>Accounting Standards</a:t>
+            </a:r>
+            <a:endParaRPr lang="en-US" sz="4000" dirty="0">
+              <a:solidFill>
+                <a:schemeClr val="accent6">
+                  <a:lumMod val="50000"/>
+                </a:schemeClr>
+              </a:solidFill>
+            </a:endParaRPr>
+          </a:p>
+          <a:p>
+            <a:pPr marL="0" indent="0">
+              <a:lnSpc>
+                <a:spcPct val="110000"/>
+              </a:lnSpc>
+              <a:buNone/>
+            </a:pPr>
+            <a:r>
+              <a:rPr lang="en-US" sz="4000" b="1" dirty="0">
+                <a:solidFill>
+                  <a:schemeClr val="accent6">
+                    <a:lumMod val="50000"/>
+                  </a:schemeClr>
+                </a:solidFill>
+                <a:latin typeface="Open Sans" pitchFamily="34" charset="0"/>
+                <a:ea typeface="Open Sans" pitchFamily="34" charset="-122"/>
+                <a:cs typeface="Open Sans" pitchFamily="34" charset="-120"/>
+              </a:rPr>
+              <a:t>&amp; GAAP Conversion</a:t>
+            </a:r>
+            <a:endParaRPr lang="en-US" sz="4000" dirty="0">
+              <a:solidFill>
+                <a:schemeClr val="accent6">
+                  <a:lumMod val="50000"/>
+                </a:schemeClr>
+              </a:solidFill>
+            </a:endParaRPr>
+          </a:p>
+        </p:txBody>
+      </p:sp>
+      <p:sp>
+        <p:nvSpPr>
+          <p:cNvPr id="5" name="Shape 3">
+            <a:extLst>
+              <a:ext uri="{FF2B5EF4-FFF2-40B4-BE49-F238E27FC236}">
+                <a16:creationId xmlns:a16="http://schemas.microsoft.com/office/drawing/2014/main" id="{839A0219-6F48-03FD-88BB-49FB29159640}"/>
+              </a:ext>
+            </a:extLst>
+          </p:cNvPr>
+          <p:cNvSpPr/>
+          <p:nvPr/>
+        </p:nvSpPr>
+        <p:spPr>
+          <a:xfrm>
+            <a:off x="731520" y="3108960"/>
+            <a:ext cx="1828800" cy="36576"/>
+          </a:xfrm>
+          <a:prstGeom prst="rect">
+            <a:avLst/>
+          </a:prstGeom>
+          <a:solidFill>
+            <a:srgbClr val="B8975C"/>
+          </a:solidFill>
+          <a:ln/>
+        </p:spPr>
+        <p:txBody>
+          <a:bodyPr/>
+          <a:lstStyle/>
+          <a:p>
+            <a:endParaRPr lang="en-US"/>
+          </a:p>
+        </p:txBody>
+      </p:sp>
+      <p:sp>
+        <p:nvSpPr>
+          <p:cNvPr id="6" name="Text 4">
+            <a:extLst>
+              <a:ext uri="{FF2B5EF4-FFF2-40B4-BE49-F238E27FC236}">
+                <a16:creationId xmlns:a16="http://schemas.microsoft.com/office/drawing/2014/main" id="{F2900D6E-9BE4-4C5F-F3CB-86C919186C1A}"/>
+              </a:ext>
+            </a:extLst>
+          </p:cNvPr>
+          <p:cNvSpPr/>
+          <p:nvPr/>
+        </p:nvSpPr>
+        <p:spPr>
+          <a:xfrm>
+            <a:off x="731520" y="3337560"/>
+            <a:ext cx="6400800" cy="731520"/>
+          </a:xfrm>
+          <a:prstGeom prst="rect">
+            <a:avLst/>
+          </a:prstGeom>
+          <a:noFill/>
+          <a:ln/>
+        </p:spPr>
+        <p:txBody>
+          <a:bodyPr wrap="square" lIns="0" tIns="0" rIns="0" bIns="0" rtlCol="0" anchor="ctr"/>
+          <a:lstStyle/>
+          <a:p>
+            <a:pPr marL="0" indent="0">
+              <a:lnSpc>
+                <a:spcPct val="140000"/>
+              </a:lnSpc>
+              <a:buNone/>
+            </a:pPr>
+            <a:r>
+              <a:rPr lang="en-US" sz="1400" dirty="0">
+                <a:solidFill>
+                  <a:srgbClr val="8A9BAD"/>
+                </a:solidFill>
+                <a:latin typeface="Open Sans" pitchFamily="34" charset="0"/>
+                <a:ea typeface="Open Sans" pitchFamily="34" charset="-122"/>
+                <a:cs typeface="Open Sans" pitchFamily="34" charset="-120"/>
+              </a:rPr>
+              <a:t>How to handle non-US-GAAP financials when populating your ratios workbook. Covers VAS, IFRS, CAS, JGAAP, and the GAAP Bridge template.</a:t>
+            </a:r>
+            <a:endParaRPr lang="en-US" sz="1400" dirty="0"/>
+          </a:p>
+        </p:txBody>
+      </p:sp>
+      <p:pic>
+        <p:nvPicPr>
+          <p:cNvPr id="7" name="Image 0" descr="preencoded.png">
+            <a:extLst>
+              <a:ext uri="{FF2B5EF4-FFF2-40B4-BE49-F238E27FC236}">
+                <a16:creationId xmlns:a16="http://schemas.microsoft.com/office/drawing/2014/main" id="{C3335FD3-0934-88F3-5290-2F0CA62CFE62}"/>
+              </a:ext>
+            </a:extLst>
+          </p:cNvPr>
+          <p:cNvPicPr>
+            <a:picLocks noChangeAspect="1"/>
+          </p:cNvPicPr>
+          <p:nvPr/>
+        </p:nvPicPr>
+        <p:blipFill>
+          <a:blip r:embed="rId3"/>
+          <a:stretch>
+            <a:fillRect/>
+          </a:stretch>
+        </p:blipFill>
+        <p:spPr>
+          <a:xfrm>
+            <a:off x="7132320" y="3200400"/>
+            <a:ext cx="1097280" cy="1097280"/>
+          </a:xfrm>
+          <a:prstGeom prst="rect">
+            <a:avLst/>
+          </a:prstGeom>
+        </p:spPr>
+      </p:pic>
+      <p:sp>
+        <p:nvSpPr>
+          <p:cNvPr id="8" name="Text 5">
+            <a:extLst>
+              <a:ext uri="{FF2B5EF4-FFF2-40B4-BE49-F238E27FC236}">
+                <a16:creationId xmlns:a16="http://schemas.microsoft.com/office/drawing/2014/main" id="{1E0F0504-7EA9-C4C2-CD3C-A13D947AD528}"/>
+              </a:ext>
+            </a:extLst>
+          </p:cNvPr>
+          <p:cNvSpPr/>
+          <p:nvPr/>
+        </p:nvSpPr>
+        <p:spPr>
+          <a:xfrm>
+            <a:off x="457200" y="4663440"/>
+            <a:ext cx="8229600" cy="320040"/>
+          </a:xfrm>
+          <a:prstGeom prst="rect">
+            <a:avLst/>
+          </a:prstGeom>
+          <a:noFill/>
+          <a:ln/>
+        </p:spPr>
+        <p:txBody>
+          <a:bodyPr wrap="square" lIns="0" tIns="0" rIns="0" bIns="0" rtlCol="0" anchor="ctr"/>
+          <a:lstStyle/>
+          <a:p>
+            <a:pPr marL="0" indent="0" algn="ctr">
+              <a:buNone/>
+            </a:pPr>
+            <a:r>
+              <a:rPr lang="en-US" sz="1000" dirty="0">
+                <a:solidFill>
+                  <a:srgbClr val="5A6B7A"/>
+                </a:solidFill>
+                <a:latin typeface="Open Sans" pitchFamily="34" charset="0"/>
+                <a:ea typeface="Open Sans" pitchFamily="34" charset="-122"/>
+                <a:cs typeface="Open Sans" pitchFamily="34" charset="-120"/>
+              </a:rPr>
+              <a:t>Shidler College of Business  |  University of Hawaiʻi at Mānoa</a:t>
+            </a:r>
+            <a:endParaRPr lang="en-US" sz="1000" dirty="0"/>
+          </a:p>
+        </p:txBody>
+      </p:sp>
+    </p:spTree>
+    <p:extLst>
+      <p:ext uri="{BB962C8B-B14F-4D97-AF65-F5344CB8AC3E}">
+        <p14:creationId xmlns:p14="http://schemas.microsoft.com/office/powerpoint/2010/main" val="303619527"/>
+      </p:ext>
+    </p:extLst>
+  </p:cSld>
+  <p:clrMapOvr>
+    <a:masterClrMapping/>
+  </p:clrMapOvr>
+</p:sld>
+</file>
+
+<file path=ppt/slides/slide53.xml><?xml version="1.0" encoding="utf-8"?>
+<p:sld xmlns:a="http://schemas.openxmlformats.org/drawingml/2006/main" xmlns:r="http://schemas.openxmlformats.org/officeDocument/2006/relationships" xmlns:p="http://schemas.openxmlformats.org/presentationml/2006/main">
+  <p:cSld name="Slide 8">
+    <p:bg>
+      <p:bgPr>
+        <a:solidFill>
+          <a:srgbClr val="FFFFFF"/>
+        </a:solidFill>
+        <a:effectLst/>
+      </p:bgPr>
+    </p:bg>
+    <p:spTree>
+      <p:nvGrpSpPr>
+        <p:cNvPr id="1" name=""/>
+        <p:cNvGrpSpPr/>
+        <p:nvPr/>
+      </p:nvGrpSpPr>
+      <p:grpSpPr>
+        <a:xfrm>
+          <a:off x="0" y="0"/>
+          <a:ext cx="0" cy="0"/>
+          <a:chOff x="0" y="0"/>
+          <a:chExt cx="0" cy="0"/>
+        </a:xfrm>
+      </p:grpSpPr>
+      <p:sp>
+        <p:nvSpPr>
+          <p:cNvPr id="2" name="Shape 0"/>
+          <p:cNvSpPr/>
+          <p:nvPr/>
+        </p:nvSpPr>
+        <p:spPr>
+          <a:xfrm>
+            <a:off x="0" y="0"/>
+            <a:ext cx="9144000" cy="822960"/>
+          </a:xfrm>
+          <a:prstGeom prst="rect">
+            <a:avLst/>
+          </a:prstGeom>
+          <a:solidFill>
+            <a:srgbClr val="024731"/>
+          </a:solidFill>
+          <a:ln/>
+        </p:spPr>
+        <p:txBody>
+          <a:bodyPr/>
+          <a:lstStyle/>
+          <a:p>
+            <a:endParaRPr lang="en-US"/>
+          </a:p>
+        </p:txBody>
+      </p:sp>
+      <p:sp>
+        <p:nvSpPr>
+          <p:cNvPr id="3" name="Text 1"/>
+          <p:cNvSpPr/>
+          <p:nvPr/>
+        </p:nvSpPr>
+        <p:spPr>
+          <a:xfrm>
+            <a:off x="548640" y="137160"/>
+            <a:ext cx="7315200" cy="274320"/>
+          </a:xfrm>
+          <a:prstGeom prst="rect">
+            <a:avLst/>
+          </a:prstGeom>
+          <a:noFill/>
+          <a:ln/>
+        </p:spPr>
+        <p:txBody>
+          <a:bodyPr wrap="square" lIns="0" tIns="0" rIns="0" bIns="0" rtlCol="0" anchor="ctr"/>
+          <a:lstStyle/>
+          <a:p>
+            <a:pPr marL="0" indent="0">
+              <a:buNone/>
+            </a:pPr>
+            <a:r>
+              <a:rPr lang="en-US" sz="2000" b="1" dirty="0">
+                <a:solidFill>
+                  <a:srgbClr val="FFFFFF"/>
+                </a:solidFill>
+                <a:latin typeface="Open Sans" pitchFamily="34" charset="0"/>
+                <a:ea typeface="Open Sans" pitchFamily="34" charset="-122"/>
+                <a:cs typeface="Open Sans" pitchFamily="34" charset="-120"/>
+              </a:rPr>
+              <a:t>Why Accounting Standards Matter</a:t>
+            </a:r>
+            <a:endParaRPr lang="en-US" sz="2000" dirty="0"/>
+          </a:p>
+        </p:txBody>
+      </p:sp>
+      <p:sp>
+        <p:nvSpPr>
+          <p:cNvPr id="4" name="Text 2"/>
+          <p:cNvSpPr/>
+          <p:nvPr/>
+        </p:nvSpPr>
+        <p:spPr>
+          <a:xfrm>
+            <a:off x="548640" y="429768"/>
+            <a:ext cx="7315200" cy="228600"/>
+          </a:xfrm>
+          <a:prstGeom prst="rect">
+            <a:avLst/>
+          </a:prstGeom>
+          <a:noFill/>
+          <a:ln/>
+        </p:spPr>
+        <p:txBody>
+          <a:bodyPr wrap="square" lIns="0" tIns="0" rIns="0" bIns="0" rtlCol="0" anchor="ctr"/>
+          <a:lstStyle/>
+          <a:p>
+            <a:pPr marL="0" indent="0">
+              <a:buNone/>
+            </a:pPr>
+            <a:r>
+              <a:rPr lang="en-US" sz="1100" dirty="0">
+                <a:solidFill>
+                  <a:srgbClr val="B8DDD1"/>
+                </a:solidFill>
+                <a:latin typeface="Open Sans" pitchFamily="34" charset="0"/>
+                <a:ea typeface="Open Sans" pitchFamily="34" charset="-122"/>
+                <a:cs typeface="Open Sans" pitchFamily="34" charset="-120"/>
+              </a:rPr>
+              <a:t>Appendix C  |  Non-US companies report under different frameworks — your ratios must account for this</a:t>
+            </a:r>
+            <a:endParaRPr lang="en-US" sz="1100" dirty="0"/>
+          </a:p>
+        </p:txBody>
+      </p:sp>
+      <p:sp>
+        <p:nvSpPr>
+          <p:cNvPr id="5" name="Text 3"/>
+          <p:cNvSpPr/>
+          <p:nvPr/>
+        </p:nvSpPr>
+        <p:spPr>
+          <a:xfrm>
+            <a:off x="548640" y="1051560"/>
+            <a:ext cx="4114800" cy="274320"/>
+          </a:xfrm>
+          <a:prstGeom prst="rect">
+            <a:avLst/>
+          </a:prstGeom>
+          <a:noFill/>
+          <a:ln/>
+        </p:spPr>
+        <p:txBody>
+          <a:bodyPr wrap="square" lIns="0" tIns="0" rIns="0" bIns="0" rtlCol="0" anchor="ctr"/>
+          <a:lstStyle/>
+          <a:p>
+            <a:pPr marL="0" indent="0">
+              <a:buNone/>
+            </a:pPr>
+            <a:r>
+              <a:rPr lang="en-US" sz="1400" b="1" dirty="0">
+                <a:solidFill>
+                  <a:srgbClr val="024731"/>
+                </a:solidFill>
+                <a:latin typeface="Open Sans" pitchFamily="34" charset="0"/>
+                <a:ea typeface="Open Sans" pitchFamily="34" charset="-122"/>
+                <a:cs typeface="Open Sans" pitchFamily="34" charset="-120"/>
+              </a:rPr>
+              <a:t>The Problem</a:t>
+            </a:r>
+            <a:endParaRPr lang="en-US" sz="1400" dirty="0"/>
+          </a:p>
+        </p:txBody>
+      </p:sp>
+      <p:sp>
+        <p:nvSpPr>
+          <p:cNvPr id="6" name="Shape 4"/>
+          <p:cNvSpPr/>
+          <p:nvPr/>
+        </p:nvSpPr>
+        <p:spPr>
+          <a:xfrm>
+            <a:off x="548640" y="1417320"/>
+            <a:ext cx="4114800" cy="502920"/>
+          </a:xfrm>
+          <a:prstGeom prst="rect">
+            <a:avLst/>
+          </a:prstGeom>
+          <a:solidFill>
+            <a:srgbClr val="E6F2EF"/>
+          </a:solidFill>
+          <a:ln/>
+        </p:spPr>
+        <p:txBody>
+          <a:bodyPr/>
+          <a:lstStyle/>
+          <a:p>
+            <a:endParaRPr lang="en-US"/>
+          </a:p>
+        </p:txBody>
+      </p:sp>
+      <p:sp>
+        <p:nvSpPr>
+          <p:cNvPr id="7" name="Text 5"/>
+          <p:cNvSpPr/>
+          <p:nvPr/>
+        </p:nvSpPr>
+        <p:spPr>
+          <a:xfrm>
+            <a:off x="685800" y="1463040"/>
+            <a:ext cx="3840480" cy="411480"/>
+          </a:xfrm>
+          <a:prstGeom prst="rect">
+            <a:avLst/>
+          </a:prstGeom>
+          <a:noFill/>
+          <a:ln/>
+        </p:spPr>
+        <p:txBody>
+          <a:bodyPr wrap="square" rtlCol="0" anchor="ctr"/>
+          <a:lstStyle/>
+          <a:p>
+            <a:pPr marL="0" indent="0">
+              <a:buNone/>
+            </a:pPr>
+            <a:r>
+              <a:rPr lang="en-US" sz="1100" b="1" dirty="0">
+                <a:solidFill>
+                  <a:srgbClr val="024731"/>
+                </a:solidFill>
+                <a:latin typeface="Open Sans" pitchFamily="34" charset="0"/>
+                <a:ea typeface="Open Sans" pitchFamily="34" charset="-122"/>
+                <a:cs typeface="Open Sans" pitchFamily="34" charset="-120"/>
+              </a:rPr>
+              <a:t>Vietnamese firms report under VAS</a:t>
+            </a:r>
+            <a:endParaRPr lang="en-US" sz="1100" dirty="0"/>
+          </a:p>
+          <a:p>
+            <a:pPr marL="0" indent="0">
+              <a:buNone/>
+            </a:pPr>
+            <a:r>
+              <a:rPr lang="en-US" sz="1100" dirty="0">
+                <a:solidFill>
+                  <a:srgbClr val="024731"/>
+                </a:solidFill>
+                <a:latin typeface="Open Sans" pitchFamily="34" charset="0"/>
+                <a:ea typeface="Open Sans" pitchFamily="34" charset="-122"/>
+                <a:cs typeface="Open Sans" pitchFamily="34" charset="-120"/>
+              </a:rPr>
+              <a:t xml:space="preserve">    which differs from US GAAP and IFRS</a:t>
+            </a:r>
+            <a:endParaRPr lang="en-US" sz="1100" dirty="0"/>
+          </a:p>
+        </p:txBody>
+      </p:sp>
+      <p:sp>
+        <p:nvSpPr>
+          <p:cNvPr id="8" name="Shape 6"/>
+          <p:cNvSpPr/>
+          <p:nvPr/>
+        </p:nvSpPr>
+        <p:spPr>
+          <a:xfrm>
+            <a:off x="548640" y="2011680"/>
+            <a:ext cx="4114800" cy="502920"/>
+          </a:xfrm>
+          <a:prstGeom prst="rect">
+            <a:avLst/>
+          </a:prstGeom>
+          <a:solidFill>
+            <a:srgbClr val="E6F2EF"/>
+          </a:solidFill>
+          <a:ln/>
+        </p:spPr>
+        <p:txBody>
+          <a:bodyPr/>
+          <a:lstStyle/>
+          <a:p>
+            <a:endParaRPr lang="en-US"/>
+          </a:p>
+        </p:txBody>
+      </p:sp>
+      <p:sp>
+        <p:nvSpPr>
+          <p:cNvPr id="9" name="Text 7"/>
+          <p:cNvSpPr/>
+          <p:nvPr/>
+        </p:nvSpPr>
+        <p:spPr>
+          <a:xfrm>
+            <a:off x="685800" y="2057400"/>
+            <a:ext cx="3840480" cy="411480"/>
+          </a:xfrm>
+          <a:prstGeom prst="rect">
+            <a:avLst/>
+          </a:prstGeom>
+          <a:noFill/>
+          <a:ln/>
+        </p:spPr>
+        <p:txBody>
+          <a:bodyPr wrap="square" rtlCol="0" anchor="ctr"/>
+          <a:lstStyle/>
+          <a:p>
+            <a:pPr marL="0" indent="0">
+              <a:buNone/>
+            </a:pPr>
+            <a:r>
+              <a:rPr lang="en-US" sz="1100" b="1" dirty="0">
+                <a:solidFill>
+                  <a:srgbClr val="024731"/>
+                </a:solidFill>
+                <a:latin typeface="Open Sans" pitchFamily="34" charset="0"/>
+                <a:ea typeface="Open Sans" pitchFamily="34" charset="-122"/>
+                <a:cs typeface="Open Sans" pitchFamily="34" charset="-120"/>
+              </a:rPr>
+              <a:t>Ratios are only comparable if the</a:t>
+            </a:r>
+            <a:endParaRPr lang="en-US" sz="1100" dirty="0"/>
+          </a:p>
+          <a:p>
+            <a:pPr marL="0" indent="0">
+              <a:buNone/>
+            </a:pPr>
+            <a:r>
+              <a:rPr lang="en-US" sz="1100" dirty="0">
+                <a:solidFill>
+                  <a:srgbClr val="024731"/>
+                </a:solidFill>
+                <a:latin typeface="Open Sans" pitchFamily="34" charset="0"/>
+                <a:ea typeface="Open Sans" pitchFamily="34" charset="-122"/>
+                <a:cs typeface="Open Sans" pitchFamily="34" charset="-120"/>
+              </a:rPr>
+              <a:t xml:space="preserve">    underlying financials are on a comparable basis</a:t>
+            </a:r>
+            <a:endParaRPr lang="en-US" sz="1100" dirty="0"/>
+          </a:p>
+        </p:txBody>
+      </p:sp>
+      <p:sp>
+        <p:nvSpPr>
+          <p:cNvPr id="10" name="Shape 8"/>
+          <p:cNvSpPr/>
+          <p:nvPr/>
+        </p:nvSpPr>
+        <p:spPr>
+          <a:xfrm>
+            <a:off x="4937760" y="1051560"/>
+            <a:ext cx="3840480" cy="3749040"/>
+          </a:xfrm>
+          <a:prstGeom prst="rect">
+            <a:avLst/>
+          </a:prstGeom>
+          <a:solidFill>
+            <a:srgbClr val="F5F7F6"/>
+          </a:solidFill>
+          <a:ln/>
+          <a:effectLst>
+            <a:outerShdw blurRad="50800" dist="12700" dir="8100000" algn="bl" rotWithShape="0">
+              <a:srgbClr val="000000">
+                <a:alpha val="10000"/>
+              </a:srgbClr>
+            </a:outerShdw>
+          </a:effectLst>
+        </p:spPr>
+        <p:txBody>
+          <a:bodyPr/>
+          <a:lstStyle/>
+          <a:p>
+            <a:endParaRPr lang="en-US"/>
+          </a:p>
+        </p:txBody>
+      </p:sp>
+      <p:sp>
+        <p:nvSpPr>
+          <p:cNvPr id="11" name="Text 9"/>
+          <p:cNvSpPr/>
+          <p:nvPr/>
+        </p:nvSpPr>
+        <p:spPr>
+          <a:xfrm>
+            <a:off x="4946904" y="1143000"/>
+            <a:ext cx="3822192" cy="320040"/>
+          </a:xfrm>
+          <a:prstGeom prst="rect">
+            <a:avLst/>
+          </a:prstGeom>
+          <a:noFill/>
+          <a:ln/>
+        </p:spPr>
+        <p:txBody>
+          <a:bodyPr wrap="square" lIns="0" tIns="0" rIns="0" bIns="0" rtlCol="0" anchor="ctr"/>
+          <a:lstStyle/>
+          <a:p>
+            <a:pPr marL="0" indent="0">
+              <a:buNone/>
+            </a:pPr>
+            <a:r>
+              <a:rPr lang="en-US" sz="1400" b="1" dirty="0">
+                <a:solidFill>
+                  <a:srgbClr val="024731"/>
+                </a:solidFill>
+                <a:latin typeface="Open Sans" pitchFamily="34" charset="0"/>
+                <a:ea typeface="Open Sans" pitchFamily="34" charset="-122"/>
+                <a:cs typeface="Open Sans" pitchFamily="34" charset="-120"/>
+              </a:rPr>
+              <a:t>Five Areas to Check</a:t>
+            </a:r>
+            <a:endParaRPr lang="en-US" sz="1400" dirty="0"/>
+          </a:p>
+        </p:txBody>
+      </p:sp>
+      <p:sp>
+        <p:nvSpPr>
+          <p:cNvPr id="12" name="Text 10"/>
+          <p:cNvSpPr/>
+          <p:nvPr/>
+        </p:nvSpPr>
+        <p:spPr>
+          <a:xfrm>
+            <a:off x="5120640" y="1417320"/>
+            <a:ext cx="3474720" cy="228600"/>
+          </a:xfrm>
+          <a:prstGeom prst="rect">
+            <a:avLst/>
+          </a:prstGeom>
+          <a:noFill/>
+          <a:ln/>
+        </p:spPr>
+        <p:txBody>
+          <a:bodyPr wrap="square" lIns="0" tIns="0" rIns="0" bIns="0" rtlCol="0" anchor="ctr"/>
+          <a:lstStyle/>
+          <a:p>
+            <a:pPr marL="0" indent="0">
+              <a:buNone/>
+            </a:pPr>
+            <a:r>
+              <a:rPr lang="en-US" sz="900" i="1" dirty="0">
+                <a:solidFill>
+                  <a:srgbClr val="6B7280"/>
+                </a:solidFill>
+                <a:latin typeface="Open Sans" pitchFamily="34" charset="0"/>
+                <a:ea typeface="Open Sans" pitchFamily="34" charset="-122"/>
+                <a:cs typeface="Open Sans" pitchFamily="34" charset="-120"/>
+              </a:rPr>
+              <a:t>Check each when using non-US-GAAP data</a:t>
+            </a:r>
+            <a:endParaRPr lang="en-US" sz="900" dirty="0"/>
+          </a:p>
+        </p:txBody>
+      </p:sp>
+      <p:sp>
+        <p:nvSpPr>
+          <p:cNvPr id="13" name="Shape 11"/>
+          <p:cNvSpPr/>
+          <p:nvPr/>
+        </p:nvSpPr>
+        <p:spPr>
+          <a:xfrm>
+            <a:off x="5212080" y="1783080"/>
+            <a:ext cx="201168" cy="201168"/>
+          </a:xfrm>
+          <a:prstGeom prst="rect">
+            <a:avLst/>
+          </a:prstGeom>
+          <a:solidFill>
+            <a:srgbClr val="FFFFFF"/>
+          </a:solidFill>
+          <a:ln w="19050">
+            <a:solidFill>
+              <a:srgbClr val="024731"/>
+            </a:solidFill>
+            <a:prstDash val="solid"/>
+          </a:ln>
+        </p:spPr>
+        <p:txBody>
+          <a:bodyPr/>
+          <a:lstStyle/>
+          <a:p>
+            <a:endParaRPr lang="en-US"/>
+          </a:p>
+        </p:txBody>
+      </p:sp>
+      <p:sp>
+        <p:nvSpPr>
+          <p:cNvPr id="14" name="Text 12"/>
+          <p:cNvSpPr/>
+          <p:nvPr/>
+        </p:nvSpPr>
+        <p:spPr>
+          <a:xfrm>
+            <a:off x="5532120" y="1764792"/>
+            <a:ext cx="3108960" cy="228600"/>
+          </a:xfrm>
+          <a:prstGeom prst="rect">
+            <a:avLst/>
+          </a:prstGeom>
+          <a:noFill/>
+          <a:ln/>
+        </p:spPr>
+        <p:txBody>
+          <a:bodyPr wrap="square" lIns="0" tIns="0" rIns="0" bIns="0" rtlCol="0" anchor="ctr"/>
+          <a:lstStyle/>
+          <a:p>
+            <a:pPr marL="0" indent="0">
+              <a:buNone/>
+            </a:pPr>
+            <a:r>
+              <a:rPr lang="en-US" sz="1000" dirty="0">
+                <a:solidFill>
+                  <a:srgbClr val="0D0D0D"/>
+                </a:solidFill>
+                <a:latin typeface="Open Sans" pitchFamily="34" charset="0"/>
+                <a:ea typeface="Open Sans" pitchFamily="34" charset="-122"/>
+                <a:cs typeface="Open Sans" pitchFamily="34" charset="-120"/>
+              </a:rPr>
+              <a:t>Inventory method (LIFO vs. FIFO)</a:t>
+            </a:r>
+            <a:endParaRPr lang="en-US" sz="1000" dirty="0"/>
+          </a:p>
+        </p:txBody>
+      </p:sp>
+      <p:sp>
+        <p:nvSpPr>
+          <p:cNvPr id="15" name="Shape 13"/>
+          <p:cNvSpPr/>
+          <p:nvPr/>
+        </p:nvSpPr>
+        <p:spPr>
+          <a:xfrm>
+            <a:off x="5212080" y="2130552"/>
+            <a:ext cx="201168" cy="201168"/>
+          </a:xfrm>
+          <a:prstGeom prst="rect">
+            <a:avLst/>
+          </a:prstGeom>
+          <a:solidFill>
+            <a:srgbClr val="FFFFFF"/>
+          </a:solidFill>
+          <a:ln w="19050">
+            <a:solidFill>
+              <a:srgbClr val="024731"/>
+            </a:solidFill>
+            <a:prstDash val="solid"/>
+          </a:ln>
+        </p:spPr>
+        <p:txBody>
+          <a:bodyPr/>
+          <a:lstStyle/>
+          <a:p>
+            <a:endParaRPr lang="en-US"/>
+          </a:p>
+        </p:txBody>
+      </p:sp>
+      <p:sp>
+        <p:nvSpPr>
+          <p:cNvPr id="16" name="Text 14"/>
+          <p:cNvSpPr/>
+          <p:nvPr/>
+        </p:nvSpPr>
+        <p:spPr>
+          <a:xfrm>
+            <a:off x="5532120" y="2112264"/>
+            <a:ext cx="3108960" cy="228600"/>
+          </a:xfrm>
+          <a:prstGeom prst="rect">
+            <a:avLst/>
+          </a:prstGeom>
+          <a:noFill/>
+          <a:ln/>
+        </p:spPr>
+        <p:txBody>
+          <a:bodyPr wrap="square" lIns="0" tIns="0" rIns="0" bIns="0" rtlCol="0" anchor="ctr"/>
+          <a:lstStyle/>
+          <a:p>
+            <a:pPr marL="0" indent="0">
+              <a:buNone/>
+            </a:pPr>
+            <a:r>
+              <a:rPr lang="en-US" sz="1000" dirty="0">
+                <a:solidFill>
+                  <a:srgbClr val="0D0D0D"/>
+                </a:solidFill>
+                <a:latin typeface="Open Sans" pitchFamily="34" charset="0"/>
+                <a:ea typeface="Open Sans" pitchFamily="34" charset="-122"/>
+                <a:cs typeface="Open Sans" pitchFamily="34" charset="-120"/>
+              </a:rPr>
+              <a:t>Leases (IFRS 16 vs. VAS off-BS)</a:t>
+            </a:r>
+            <a:endParaRPr lang="en-US" sz="1000" dirty="0"/>
+          </a:p>
+        </p:txBody>
+      </p:sp>
+      <p:sp>
+        <p:nvSpPr>
+          <p:cNvPr id="17" name="Shape 15"/>
+          <p:cNvSpPr/>
+          <p:nvPr/>
+        </p:nvSpPr>
+        <p:spPr>
+          <a:xfrm>
+            <a:off x="5212080" y="2478024"/>
+            <a:ext cx="201168" cy="201168"/>
+          </a:xfrm>
+          <a:prstGeom prst="rect">
+            <a:avLst/>
+          </a:prstGeom>
+          <a:solidFill>
+            <a:srgbClr val="FFFFFF"/>
+          </a:solidFill>
+          <a:ln w="19050">
+            <a:solidFill>
+              <a:srgbClr val="024731"/>
+            </a:solidFill>
+            <a:prstDash val="solid"/>
+          </a:ln>
+        </p:spPr>
+        <p:txBody>
+          <a:bodyPr/>
+          <a:lstStyle/>
+          <a:p>
+            <a:endParaRPr lang="en-US"/>
+          </a:p>
+        </p:txBody>
+      </p:sp>
+      <p:sp>
+        <p:nvSpPr>
+          <p:cNvPr id="18" name="Text 16"/>
+          <p:cNvSpPr/>
+          <p:nvPr/>
+        </p:nvSpPr>
+        <p:spPr>
+          <a:xfrm>
+            <a:off x="5532120" y="2459736"/>
+            <a:ext cx="3108960" cy="228600"/>
+          </a:xfrm>
+          <a:prstGeom prst="rect">
+            <a:avLst/>
+          </a:prstGeom>
+          <a:noFill/>
+          <a:ln/>
+        </p:spPr>
+        <p:txBody>
+          <a:bodyPr wrap="square" lIns="0" tIns="0" rIns="0" bIns="0" rtlCol="0" anchor="ctr"/>
+          <a:lstStyle/>
+          <a:p>
+            <a:pPr marL="0" indent="0">
+              <a:buNone/>
+            </a:pPr>
+            <a:r>
+              <a:rPr lang="en-US" sz="1000" dirty="0">
+                <a:solidFill>
+                  <a:srgbClr val="0D0D0D"/>
+                </a:solidFill>
+                <a:latin typeface="Open Sans" pitchFamily="34" charset="0"/>
+                <a:ea typeface="Open Sans" pitchFamily="34" charset="-122"/>
+                <a:cs typeface="Open Sans" pitchFamily="34" charset="-120"/>
+              </a:rPr>
+              <a:t>R&amp;D / development cost capitalization</a:t>
+            </a:r>
+            <a:endParaRPr lang="en-US" sz="1000" dirty="0"/>
+          </a:p>
+        </p:txBody>
+      </p:sp>
+      <p:sp>
+        <p:nvSpPr>
+          <p:cNvPr id="19" name="Shape 17"/>
+          <p:cNvSpPr/>
+          <p:nvPr/>
+        </p:nvSpPr>
+        <p:spPr>
+          <a:xfrm>
+            <a:off x="5212080" y="2825496"/>
+            <a:ext cx="201168" cy="201168"/>
+          </a:xfrm>
+          <a:prstGeom prst="rect">
+            <a:avLst/>
+          </a:prstGeom>
+          <a:solidFill>
+            <a:srgbClr val="FFFFFF"/>
+          </a:solidFill>
+          <a:ln w="19050">
+            <a:solidFill>
+              <a:srgbClr val="024731"/>
+            </a:solidFill>
+            <a:prstDash val="solid"/>
+          </a:ln>
+        </p:spPr>
+        <p:txBody>
+          <a:bodyPr/>
+          <a:lstStyle/>
+          <a:p>
+            <a:endParaRPr lang="en-US"/>
+          </a:p>
+        </p:txBody>
+      </p:sp>
+      <p:sp>
+        <p:nvSpPr>
+          <p:cNvPr id="20" name="Text 18"/>
+          <p:cNvSpPr/>
+          <p:nvPr/>
+        </p:nvSpPr>
+        <p:spPr>
+          <a:xfrm>
+            <a:off x="5532120" y="2807208"/>
+            <a:ext cx="3108960" cy="228600"/>
+          </a:xfrm>
+          <a:prstGeom prst="rect">
+            <a:avLst/>
+          </a:prstGeom>
+          <a:noFill/>
+          <a:ln/>
+        </p:spPr>
+        <p:txBody>
+          <a:bodyPr wrap="square" lIns="0" tIns="0" rIns="0" bIns="0" rtlCol="0" anchor="ctr"/>
+          <a:lstStyle/>
+          <a:p>
+            <a:pPr marL="0" indent="0">
+              <a:buNone/>
+            </a:pPr>
+            <a:r>
+              <a:rPr lang="en-US" sz="1000" dirty="0">
+                <a:solidFill>
+                  <a:srgbClr val="0D0D0D"/>
+                </a:solidFill>
+                <a:latin typeface="Open Sans" pitchFamily="34" charset="0"/>
+                <a:ea typeface="Open Sans" pitchFamily="34" charset="-122"/>
+                <a:cs typeface="Open Sans" pitchFamily="34" charset="-120"/>
+              </a:rPr>
+              <a:t>Impairment reversals (IFRS allows)</a:t>
+            </a:r>
+            <a:endParaRPr lang="en-US" sz="1000" dirty="0"/>
+          </a:p>
+        </p:txBody>
+      </p:sp>
+      <p:sp>
+        <p:nvSpPr>
+          <p:cNvPr id="21" name="Shape 19"/>
+          <p:cNvSpPr/>
+          <p:nvPr/>
+        </p:nvSpPr>
+        <p:spPr>
+          <a:xfrm>
+            <a:off x="5212080" y="3172968"/>
+            <a:ext cx="201168" cy="201168"/>
+          </a:xfrm>
+          <a:prstGeom prst="rect">
+            <a:avLst/>
+          </a:prstGeom>
+          <a:solidFill>
+            <a:srgbClr val="FFFFFF"/>
+          </a:solidFill>
+          <a:ln w="19050">
+            <a:solidFill>
+              <a:srgbClr val="024731"/>
+            </a:solidFill>
+            <a:prstDash val="solid"/>
+          </a:ln>
+        </p:spPr>
+        <p:txBody>
+          <a:bodyPr/>
+          <a:lstStyle/>
+          <a:p>
+            <a:endParaRPr lang="en-US"/>
+          </a:p>
+        </p:txBody>
+      </p:sp>
+      <p:sp>
+        <p:nvSpPr>
+          <p:cNvPr id="22" name="Text 20"/>
+          <p:cNvSpPr/>
+          <p:nvPr/>
+        </p:nvSpPr>
+        <p:spPr>
+          <a:xfrm>
+            <a:off x="5532120" y="3154680"/>
+            <a:ext cx="3108960" cy="228600"/>
+          </a:xfrm>
+          <a:prstGeom prst="rect">
+            <a:avLst/>
+          </a:prstGeom>
+          <a:noFill/>
+          <a:ln/>
+        </p:spPr>
+        <p:txBody>
+          <a:bodyPr wrap="square" lIns="0" tIns="0" rIns="0" bIns="0" rtlCol="0" anchor="ctr"/>
+          <a:lstStyle/>
+          <a:p>
+            <a:pPr marL="0" indent="0">
+              <a:buNone/>
+            </a:pPr>
+            <a:r>
+              <a:rPr lang="en-US" sz="1000" dirty="0">
+                <a:solidFill>
+                  <a:srgbClr val="0D0D0D"/>
+                </a:solidFill>
+                <a:latin typeface="Open Sans" pitchFamily="34" charset="0"/>
+                <a:ea typeface="Open Sans" pitchFamily="34" charset="-122"/>
+                <a:cs typeface="Open Sans" pitchFamily="34" charset="-120"/>
+              </a:rPr>
+              <a:t>Revenue recognition timing</a:t>
+            </a:r>
+            <a:endParaRPr lang="en-US" sz="1000" dirty="0"/>
+          </a:p>
+        </p:txBody>
+      </p:sp>
+      <p:sp>
+        <p:nvSpPr>
+          <p:cNvPr id="23" name="Shape 21"/>
+          <p:cNvSpPr/>
+          <p:nvPr/>
+        </p:nvSpPr>
+        <p:spPr>
+          <a:xfrm>
+            <a:off x="5212080" y="3520440"/>
+            <a:ext cx="201168" cy="201168"/>
+          </a:xfrm>
+          <a:prstGeom prst="rect">
+            <a:avLst/>
+          </a:prstGeom>
+          <a:solidFill>
+            <a:srgbClr val="FFFFFF"/>
+          </a:solidFill>
+          <a:ln w="19050">
+            <a:solidFill>
+              <a:srgbClr val="024731"/>
+            </a:solidFill>
+            <a:prstDash val="solid"/>
+          </a:ln>
+        </p:spPr>
+        <p:txBody>
+          <a:bodyPr/>
+          <a:lstStyle/>
+          <a:p>
+            <a:endParaRPr lang="en-US"/>
+          </a:p>
+        </p:txBody>
+      </p:sp>
+      <p:sp>
+        <p:nvSpPr>
+          <p:cNvPr id="24" name="Text 22"/>
+          <p:cNvSpPr/>
+          <p:nvPr/>
+        </p:nvSpPr>
+        <p:spPr>
+          <a:xfrm>
+            <a:off x="5532120" y="3502152"/>
+            <a:ext cx="3108960" cy="228600"/>
+          </a:xfrm>
+          <a:prstGeom prst="rect">
+            <a:avLst/>
+          </a:prstGeom>
+          <a:noFill/>
+          <a:ln/>
+        </p:spPr>
+        <p:txBody>
+          <a:bodyPr wrap="square" lIns="0" tIns="0" rIns="0" bIns="0" rtlCol="0" anchor="ctr"/>
+          <a:lstStyle/>
+          <a:p>
+            <a:pPr marL="0" indent="0">
+              <a:buNone/>
+            </a:pPr>
+            <a:r>
+              <a:rPr lang="en-US" sz="1000" dirty="0">
+                <a:solidFill>
+                  <a:srgbClr val="0D0D0D"/>
+                </a:solidFill>
+                <a:latin typeface="Open Sans" pitchFamily="34" charset="0"/>
+                <a:ea typeface="Open Sans" pitchFamily="34" charset="-122"/>
+                <a:cs typeface="Open Sans" pitchFamily="34" charset="-120"/>
+              </a:rPr>
+              <a:t>GAAP Bridge tab completed</a:t>
+            </a:r>
+            <a:endParaRPr lang="en-US" sz="1000" dirty="0"/>
+          </a:p>
+        </p:txBody>
+      </p:sp>
+      <p:sp>
+        <p:nvSpPr>
+          <p:cNvPr id="29" name="Shape 27"/>
+          <p:cNvSpPr/>
+          <p:nvPr/>
+        </p:nvSpPr>
+        <p:spPr>
+          <a:xfrm>
+            <a:off x="548640" y="4434840"/>
+            <a:ext cx="4114800" cy="457200"/>
+          </a:xfrm>
+          <a:prstGeom prst="rect">
+            <a:avLst/>
+          </a:prstGeom>
+          <a:solidFill>
+            <a:srgbClr val="024731"/>
+          </a:solidFill>
+          <a:ln/>
+        </p:spPr>
+        <p:txBody>
+          <a:bodyPr/>
+          <a:lstStyle/>
+          <a:p>
+            <a:endParaRPr lang="en-US"/>
+          </a:p>
+        </p:txBody>
+      </p:sp>
+      <p:sp>
+        <p:nvSpPr>
+          <p:cNvPr id="30" name="Text 28"/>
+          <p:cNvSpPr/>
+          <p:nvPr/>
+        </p:nvSpPr>
+        <p:spPr>
+          <a:xfrm>
+            <a:off x="685800" y="4453128"/>
+            <a:ext cx="3840480" cy="411480"/>
+          </a:xfrm>
+          <a:prstGeom prst="rect">
+            <a:avLst/>
+          </a:prstGeom>
+          <a:noFill/>
+          <a:ln/>
+        </p:spPr>
+        <p:txBody>
+          <a:bodyPr wrap="square" rtlCol="0" anchor="ctr"/>
+          <a:lstStyle/>
+          <a:p>
+            <a:pPr marL="0" indent="0">
+              <a:buNone/>
+            </a:pPr>
+            <a:r>
+              <a:rPr lang="en-US" sz="1000" dirty="0">
+                <a:solidFill>
+                  <a:srgbClr val="FFFFFF"/>
+                </a:solidFill>
+                <a:latin typeface="Open Sans" pitchFamily="34" charset="0"/>
+                <a:ea typeface="Open Sans" pitchFamily="34" charset="-122"/>
+                <a:cs typeface="Open Sans" pitchFamily="34" charset="-120"/>
+              </a:rPr>
+              <a:t>You are graded on quality of disclosure, not on performing a full conversion. Identify the standard, check the five areas, note what you found.</a:t>
+            </a:r>
+            <a:endParaRPr lang="en-US" sz="1000" dirty="0"/>
+          </a:p>
+        </p:txBody>
+      </p:sp>
+    </p:spTree>
+  </p:cSld>
+  <p:clrMapOvr>
+    <a:masterClrMapping/>
+  </p:clrMapOvr>
+</p:sld>
+</file>
+
+<file path=ppt/slides/slide54.xml><?xml version="1.0" encoding="utf-8"?>
+<p:sld xmlns:a="http://schemas.openxmlformats.org/drawingml/2006/main" xmlns:r="http://schemas.openxmlformats.org/officeDocument/2006/relationships" xmlns:p="http://schemas.openxmlformats.org/presentationml/2006/main">
+  <p:cSld name="Slide 8">
+    <p:bg>
+      <p:bgPr>
+        <a:solidFill>
+          <a:srgbClr val="FFFFFF"/>
+        </a:solidFill>
+        <a:effectLst/>
+      </p:bgPr>
+    </p:bg>
+    <p:spTree>
+      <p:nvGrpSpPr>
+        <p:cNvPr id="1" name=""/>
+        <p:cNvGrpSpPr/>
+        <p:nvPr/>
+      </p:nvGrpSpPr>
+      <p:grpSpPr>
+        <a:xfrm>
+          <a:off x="0" y="0"/>
+          <a:ext cx="0" cy="0"/>
+          <a:chOff x="0" y="0"/>
+          <a:chExt cx="0" cy="0"/>
+        </a:xfrm>
+      </p:grpSpPr>
+      <p:sp>
+        <p:nvSpPr>
+          <p:cNvPr id="2" name="Shape 0"/>
+          <p:cNvSpPr/>
+          <p:nvPr/>
+        </p:nvSpPr>
+        <p:spPr>
+          <a:xfrm>
+            <a:off x="0" y="0"/>
+            <a:ext cx="9144000" cy="822960"/>
+          </a:xfrm>
+          <a:prstGeom prst="rect">
+            <a:avLst/>
+          </a:prstGeom>
+          <a:solidFill>
+            <a:srgbClr val="024731"/>
+          </a:solidFill>
+          <a:ln/>
+        </p:spPr>
+        <p:txBody>
+          <a:bodyPr/>
+          <a:lstStyle/>
+          <a:p>
+            <a:endParaRPr lang="en-US"/>
+          </a:p>
+        </p:txBody>
+      </p:sp>
+      <p:sp>
+        <p:nvSpPr>
+          <p:cNvPr id="3" name="Text 1"/>
+          <p:cNvSpPr/>
+          <p:nvPr/>
+        </p:nvSpPr>
+        <p:spPr>
+          <a:xfrm>
+            <a:off x="548640" y="137160"/>
+            <a:ext cx="7315200" cy="274320"/>
+          </a:xfrm>
+          <a:prstGeom prst="rect">
+            <a:avLst/>
+          </a:prstGeom>
+          <a:noFill/>
+          <a:ln/>
+        </p:spPr>
+        <p:txBody>
+          <a:bodyPr wrap="square" lIns="0" tIns="0" rIns="0" bIns="0" rtlCol="0" anchor="ctr"/>
+          <a:lstStyle/>
+          <a:p>
+            <a:pPr marL="0" indent="0">
+              <a:buNone/>
+            </a:pPr>
+            <a:r>
+              <a:rPr lang="en-US" sz="2000" b="1" dirty="0">
+                <a:solidFill>
+                  <a:srgbClr val="FFFFFF"/>
+                </a:solidFill>
+                <a:latin typeface="Open Sans" pitchFamily="34" charset="0"/>
+                <a:ea typeface="Open Sans" pitchFamily="34" charset="-122"/>
+                <a:cs typeface="Open Sans" pitchFamily="34" charset="-120"/>
+              </a:rPr>
+              <a:t>What You Need to Do</a:t>
+            </a:r>
+            <a:endParaRPr lang="en-US" sz="2000" dirty="0"/>
+          </a:p>
+        </p:txBody>
+      </p:sp>
+      <p:sp>
+        <p:nvSpPr>
+          <p:cNvPr id="4" name="Text 2"/>
+          <p:cNvSpPr/>
+          <p:nvPr/>
+        </p:nvSpPr>
+        <p:spPr>
+          <a:xfrm>
+            <a:off x="548640" y="429768"/>
+            <a:ext cx="7315200" cy="228600"/>
+          </a:xfrm>
+          <a:prstGeom prst="rect">
+            <a:avLst/>
+          </a:prstGeom>
+          <a:noFill/>
+          <a:ln/>
+        </p:spPr>
+        <p:txBody>
+          <a:bodyPr wrap="square" lIns="0" tIns="0" rIns="0" bIns="0" rtlCol="0" anchor="ctr"/>
+          <a:lstStyle/>
+          <a:p>
+            <a:pPr marL="0" indent="0">
+              <a:buNone/>
+            </a:pPr>
+            <a:r>
+              <a:rPr lang="en-US" sz="1100" dirty="0">
+                <a:solidFill>
+                  <a:srgbClr val="B8DDD1"/>
+                </a:solidFill>
+                <a:latin typeface="Open Sans" pitchFamily="34" charset="0"/>
+                <a:ea typeface="Open Sans" pitchFamily="34" charset="-122"/>
+                <a:cs typeface="Open Sans" pitchFamily="34" charset="-120"/>
+              </a:rPr>
+              <a:t>Appendix C  |  Four steps when your company reports under VAS, IFRS, CAS, or another non-US standard</a:t>
+            </a:r>
+            <a:endParaRPr lang="en-US" sz="1100" dirty="0"/>
+          </a:p>
+        </p:txBody>
+      </p:sp>
+      <p:sp>
+        <p:nvSpPr>
+          <p:cNvPr id="5" name="Text 3"/>
+          <p:cNvSpPr/>
+          <p:nvPr/>
+        </p:nvSpPr>
+        <p:spPr>
+          <a:xfrm>
+            <a:off x="548640" y="1051560"/>
+            <a:ext cx="4114800" cy="274320"/>
+          </a:xfrm>
+          <a:prstGeom prst="rect">
+            <a:avLst/>
+          </a:prstGeom>
+          <a:noFill/>
+          <a:ln/>
+        </p:spPr>
+        <p:txBody>
+          <a:bodyPr wrap="square" lIns="0" tIns="0" rIns="0" bIns="0" rtlCol="0" anchor="ctr"/>
+          <a:lstStyle/>
+          <a:p>
+            <a:pPr marL="0" indent="0">
+              <a:buNone/>
+            </a:pPr>
+            <a:r>
+              <a:rPr lang="en-US" sz="1400" b="1" dirty="0">
+                <a:solidFill>
+                  <a:srgbClr val="024731"/>
+                </a:solidFill>
+                <a:latin typeface="Open Sans" pitchFamily="34" charset="0"/>
+                <a:ea typeface="Open Sans" pitchFamily="34" charset="-122"/>
+                <a:cs typeface="Open Sans" pitchFamily="34" charset="-120"/>
+              </a:rPr>
+              <a:t>Four Steps</a:t>
+            </a:r>
+            <a:endParaRPr lang="en-US" sz="1400" dirty="0"/>
+          </a:p>
+        </p:txBody>
+      </p:sp>
+      <p:sp>
+        <p:nvSpPr>
+          <p:cNvPr id="6" name="Shape 4"/>
+          <p:cNvSpPr/>
+          <p:nvPr/>
+        </p:nvSpPr>
+        <p:spPr>
+          <a:xfrm>
+            <a:off x="548640" y="1417320"/>
+            <a:ext cx="4114800" cy="502920"/>
+          </a:xfrm>
+          <a:prstGeom prst="rect">
+            <a:avLst/>
+          </a:prstGeom>
+          <a:solidFill>
+            <a:srgbClr val="E6F2EF"/>
+          </a:solidFill>
+          <a:ln/>
+        </p:spPr>
+        <p:txBody>
+          <a:bodyPr/>
+          <a:lstStyle/>
+          <a:p>
+            <a:endParaRPr lang="en-US"/>
+          </a:p>
+        </p:txBody>
+      </p:sp>
+      <p:sp>
+        <p:nvSpPr>
+          <p:cNvPr id="7" name="Text 5"/>
+          <p:cNvSpPr/>
+          <p:nvPr/>
+        </p:nvSpPr>
+        <p:spPr>
+          <a:xfrm>
+            <a:off x="685800" y="1463040"/>
+            <a:ext cx="3840480" cy="411480"/>
+          </a:xfrm>
+          <a:prstGeom prst="rect">
+            <a:avLst/>
+          </a:prstGeom>
+          <a:noFill/>
+          <a:ln/>
+        </p:spPr>
+        <p:txBody>
+          <a:bodyPr wrap="square" rtlCol="0" anchor="ctr"/>
+          <a:lstStyle/>
+          <a:p>
+            <a:pPr marL="0" indent="0">
+              <a:buNone/>
+            </a:pPr>
+            <a:r>
+              <a:rPr lang="en-US" sz="1100" b="1" dirty="0">
+                <a:solidFill>
+                  <a:srgbClr val="024731"/>
+                </a:solidFill>
+                <a:latin typeface="Open Sans" pitchFamily="34" charset="0"/>
+                <a:ea typeface="Open Sans" pitchFamily="34" charset="-122"/>
+                <a:cs typeface="Open Sans" pitchFamily="34" charset="-120"/>
+              </a:rPr>
+              <a:t>1. Identify the reporting standard</a:t>
+            </a:r>
+            <a:endParaRPr lang="en-US" sz="1100" dirty="0"/>
+          </a:p>
+          <a:p>
+            <a:pPr marL="0" indent="0">
+              <a:buNone/>
+            </a:pPr>
+            <a:r>
+              <a:rPr lang="en-US" sz="1100" dirty="0">
+                <a:solidFill>
+                  <a:srgbClr val="024731"/>
+                </a:solidFill>
+                <a:latin typeface="Open Sans" pitchFamily="34" charset="0"/>
+                <a:ea typeface="Open Sans" pitchFamily="34" charset="-122"/>
+                <a:cs typeface="Open Sans" pitchFamily="34" charset="-120"/>
+              </a:rPr>
+              <a:t xml:space="preserve">    Record in Cover &amp; Instructions tab</a:t>
+            </a:r>
+            <a:endParaRPr lang="en-US" sz="1100" dirty="0"/>
+          </a:p>
+        </p:txBody>
+      </p:sp>
+      <p:sp>
+        <p:nvSpPr>
+          <p:cNvPr id="8" name="Shape 6"/>
+          <p:cNvSpPr/>
+          <p:nvPr/>
+        </p:nvSpPr>
+        <p:spPr>
+          <a:xfrm>
+            <a:off x="548640" y="2011680"/>
+            <a:ext cx="4114800" cy="502920"/>
+          </a:xfrm>
+          <a:prstGeom prst="rect">
+            <a:avLst/>
+          </a:prstGeom>
+          <a:solidFill>
+            <a:srgbClr val="E6F2EF"/>
+          </a:solidFill>
+          <a:ln/>
+        </p:spPr>
+        <p:txBody>
+          <a:bodyPr/>
+          <a:lstStyle/>
+          <a:p>
+            <a:endParaRPr lang="en-US"/>
+          </a:p>
+        </p:txBody>
+      </p:sp>
+      <p:sp>
+        <p:nvSpPr>
+          <p:cNvPr id="9" name="Text 7"/>
+          <p:cNvSpPr/>
+          <p:nvPr/>
+        </p:nvSpPr>
+        <p:spPr>
+          <a:xfrm>
+            <a:off x="685800" y="2057400"/>
+            <a:ext cx="3840480" cy="411480"/>
+          </a:xfrm>
+          <a:prstGeom prst="rect">
+            <a:avLst/>
+          </a:prstGeom>
+          <a:noFill/>
+          <a:ln/>
+        </p:spPr>
+        <p:txBody>
+          <a:bodyPr wrap="square" rtlCol="0" anchor="ctr"/>
+          <a:lstStyle/>
+          <a:p>
+            <a:pPr marL="0" indent="0">
+              <a:buNone/>
+            </a:pPr>
+            <a:r>
+              <a:rPr lang="en-US" sz="1100" b="1" dirty="0">
+                <a:solidFill>
+                  <a:srgbClr val="024731"/>
+                </a:solidFill>
+                <a:latin typeface="Open Sans" pitchFamily="34" charset="0"/>
+                <a:ea typeface="Open Sans" pitchFamily="34" charset="-122"/>
+                <a:cs typeface="Open Sans" pitchFamily="34" charset="-120"/>
+              </a:rPr>
+              <a:t>2. Check the five high-impact areas</a:t>
+            </a:r>
+            <a:endParaRPr lang="en-US" sz="1100" dirty="0"/>
+          </a:p>
+          <a:p>
+            <a:pPr marL="0" indent="0">
+              <a:buNone/>
+            </a:pPr>
+            <a:r>
+              <a:rPr lang="en-US" sz="1100" dirty="0">
+                <a:solidFill>
+                  <a:srgbClr val="024731"/>
+                </a:solidFill>
+                <a:latin typeface="Open Sans" pitchFamily="34" charset="0"/>
+                <a:ea typeface="Open Sans" pitchFamily="34" charset="-122"/>
+                <a:cs typeface="Open Sans" pitchFamily="34" charset="-120"/>
+              </a:rPr>
+              <a:t xml:space="preserve">    Use the quick-reference checklist</a:t>
+            </a:r>
+            <a:endParaRPr lang="en-US" sz="1100" dirty="0"/>
+          </a:p>
+        </p:txBody>
+      </p:sp>
+      <p:sp>
+        <p:nvSpPr>
+          <p:cNvPr id="10" name="Shape 8"/>
+          <p:cNvSpPr/>
+          <p:nvPr/>
+        </p:nvSpPr>
+        <p:spPr>
+          <a:xfrm>
+            <a:off x="4937760" y="1051560"/>
+            <a:ext cx="3840480" cy="3749040"/>
+          </a:xfrm>
+          <a:prstGeom prst="rect">
+            <a:avLst/>
+          </a:prstGeom>
+          <a:solidFill>
+            <a:srgbClr val="F5F7F6"/>
+          </a:solidFill>
+          <a:ln/>
+          <a:effectLst>
+            <a:outerShdw blurRad="50800" dist="12700" dir="8100000" algn="bl" rotWithShape="0">
+              <a:srgbClr val="000000">
+                <a:alpha val="10000"/>
+              </a:srgbClr>
+            </a:outerShdw>
+          </a:effectLst>
+        </p:spPr>
+        <p:txBody>
+          <a:bodyPr/>
+          <a:lstStyle/>
+          <a:p>
+            <a:endParaRPr lang="en-US"/>
+          </a:p>
+        </p:txBody>
+      </p:sp>
+      <p:sp>
+        <p:nvSpPr>
+          <p:cNvPr id="11" name="Text 9"/>
+          <p:cNvSpPr/>
+          <p:nvPr/>
+        </p:nvSpPr>
+        <p:spPr>
+          <a:xfrm>
+            <a:off x="4946904" y="1143000"/>
+            <a:ext cx="3822192" cy="320040"/>
+          </a:xfrm>
+          <a:prstGeom prst="rect">
+            <a:avLst/>
+          </a:prstGeom>
+          <a:noFill/>
+          <a:ln/>
+        </p:spPr>
+        <p:txBody>
+          <a:bodyPr wrap="square" lIns="0" tIns="0" rIns="0" bIns="0" rtlCol="0" anchor="ctr"/>
+          <a:lstStyle/>
+          <a:p>
+            <a:pPr marL="0" indent="0">
+              <a:buNone/>
+            </a:pPr>
+            <a:r>
+              <a:rPr lang="en-US" sz="1400" b="1" dirty="0">
+                <a:solidFill>
+                  <a:srgbClr val="024731"/>
+                </a:solidFill>
+                <a:latin typeface="Open Sans" pitchFamily="34" charset="0"/>
+                <a:ea typeface="Open Sans" pitchFamily="34" charset="-122"/>
+                <a:cs typeface="Open Sans" pitchFamily="34" charset="-120"/>
+              </a:rPr>
+              <a:t>Steps 3 &amp; 4</a:t>
+            </a:r>
+            <a:endParaRPr lang="en-US" sz="1400" dirty="0"/>
+          </a:p>
+        </p:txBody>
+      </p:sp>
+      <p:sp>
+        <p:nvSpPr>
+          <p:cNvPr id="12" name="Text 10"/>
+          <p:cNvSpPr/>
+          <p:nvPr/>
+        </p:nvSpPr>
+        <p:spPr>
+          <a:xfrm>
+            <a:off x="5120640" y="1417320"/>
+            <a:ext cx="3474720" cy="228600"/>
+          </a:xfrm>
+          <a:prstGeom prst="rect">
+            <a:avLst/>
+          </a:prstGeom>
+          <a:noFill/>
+          <a:ln/>
+        </p:spPr>
+        <p:txBody>
+          <a:bodyPr wrap="square" lIns="0" tIns="0" rIns="0" bIns="0" rtlCol="0" anchor="ctr"/>
+          <a:lstStyle/>
+          <a:p>
+            <a:pPr marL="0" indent="0">
+              <a:buNone/>
+            </a:pPr>
+            <a:r>
+              <a:rPr lang="en-US" sz="900" i="1" dirty="0">
+                <a:solidFill>
+                  <a:srgbClr val="6B7280"/>
+                </a:solidFill>
+                <a:latin typeface="Open Sans" pitchFamily="34" charset="0"/>
+                <a:ea typeface="Open Sans" pitchFamily="34" charset="-122"/>
+                <a:cs typeface="Open Sans" pitchFamily="34" charset="-120"/>
+              </a:rPr>
+              <a:t>Complete in your workbook</a:t>
+            </a:r>
+            <a:endParaRPr lang="en-US" sz="900" dirty="0"/>
+          </a:p>
+        </p:txBody>
+      </p:sp>
+      <p:sp>
+        <p:nvSpPr>
+          <p:cNvPr id="13" name="Shape 11"/>
+          <p:cNvSpPr/>
+          <p:nvPr/>
+        </p:nvSpPr>
+        <p:spPr>
+          <a:xfrm>
+            <a:off x="5212080" y="1783080"/>
+            <a:ext cx="201168" cy="201168"/>
+          </a:xfrm>
+          <a:prstGeom prst="rect">
+            <a:avLst/>
+          </a:prstGeom>
+          <a:solidFill>
+            <a:srgbClr val="FFFFFF"/>
+          </a:solidFill>
+          <a:ln w="19050">
+            <a:solidFill>
+              <a:srgbClr val="024731"/>
+            </a:solidFill>
+            <a:prstDash val="solid"/>
+          </a:ln>
+        </p:spPr>
+        <p:txBody>
+          <a:bodyPr/>
+          <a:lstStyle/>
+          <a:p>
+            <a:endParaRPr lang="en-US"/>
+          </a:p>
+        </p:txBody>
+      </p:sp>
+      <p:sp>
+        <p:nvSpPr>
+          <p:cNvPr id="14" name="Text 12"/>
+          <p:cNvSpPr/>
+          <p:nvPr/>
+        </p:nvSpPr>
+        <p:spPr>
+          <a:xfrm>
+            <a:off x="5532120" y="1764792"/>
+            <a:ext cx="3108960" cy="228600"/>
+          </a:xfrm>
+          <a:prstGeom prst="rect">
+            <a:avLst/>
+          </a:prstGeom>
+          <a:noFill/>
+          <a:ln/>
+        </p:spPr>
+        <p:txBody>
+          <a:bodyPr wrap="square" lIns="0" tIns="0" rIns="0" bIns="0" rtlCol="0" anchor="ctr"/>
+          <a:lstStyle/>
+          <a:p>
+            <a:pPr marL="0" indent="0">
+              <a:buNone/>
+            </a:pPr>
+            <a:r>
+              <a:rPr lang="en-US" sz="1000" dirty="0">
+                <a:solidFill>
+                  <a:srgbClr val="0D0D0D"/>
+                </a:solidFill>
+                <a:latin typeface="Open Sans" pitchFamily="34" charset="0"/>
+                <a:ea typeface="Open Sans" pitchFamily="34" charset="-122"/>
+                <a:cs typeface="Open Sans" pitchFamily="34" charset="-120"/>
+              </a:rPr>
+              <a:t>3. Fill in the GAAP Bridge tab</a:t>
+            </a:r>
+            <a:endParaRPr lang="en-US" sz="1000" dirty="0"/>
+          </a:p>
+        </p:txBody>
+      </p:sp>
+      <p:sp>
+        <p:nvSpPr>
+          <p:cNvPr id="15" name="Shape 13"/>
+          <p:cNvSpPr/>
+          <p:nvPr/>
+        </p:nvSpPr>
+        <p:spPr>
+          <a:xfrm>
+            <a:off x="5212080" y="2130552"/>
+            <a:ext cx="201168" cy="201168"/>
+          </a:xfrm>
+          <a:prstGeom prst="rect">
+            <a:avLst/>
+          </a:prstGeom>
+          <a:solidFill>
+            <a:srgbClr val="FFFFFF"/>
+          </a:solidFill>
+          <a:ln w="19050">
+            <a:solidFill>
+              <a:srgbClr val="024731"/>
+            </a:solidFill>
+            <a:prstDash val="solid"/>
+          </a:ln>
+        </p:spPr>
+        <p:txBody>
+          <a:bodyPr/>
+          <a:lstStyle/>
+          <a:p>
+            <a:endParaRPr lang="en-US"/>
+          </a:p>
+        </p:txBody>
+      </p:sp>
+      <p:sp>
+        <p:nvSpPr>
+          <p:cNvPr id="16" name="Text 14"/>
+          <p:cNvSpPr/>
+          <p:nvPr/>
+        </p:nvSpPr>
+        <p:spPr>
+          <a:xfrm>
+            <a:off x="5532120" y="2112264"/>
+            <a:ext cx="3108960" cy="228600"/>
+          </a:xfrm>
+          <a:prstGeom prst="rect">
+            <a:avLst/>
+          </a:prstGeom>
+          <a:noFill/>
+          <a:ln/>
+        </p:spPr>
+        <p:txBody>
+          <a:bodyPr wrap="square" lIns="0" tIns="0" rIns="0" bIns="0" rtlCol="0" anchor="ctr"/>
+          <a:lstStyle/>
+          <a:p>
+            <a:pPr marL="0" indent="0">
+              <a:buNone/>
+            </a:pPr>
+            <a:r>
+              <a:rPr lang="en-US" sz="1000" dirty="0">
+                <a:solidFill>
+                  <a:srgbClr val="0D0D0D"/>
+                </a:solidFill>
+                <a:latin typeface="Open Sans" pitchFamily="34" charset="0"/>
+                <a:ea typeface="Open Sans" pitchFamily="34" charset="-122"/>
+                <a:cs typeface="Open Sans" pitchFamily="34" charset="-120"/>
+              </a:rPr>
+              <a:t>Copy from models/templates/</a:t>
+            </a:r>
+            <a:endParaRPr lang="en-US" sz="1000" dirty="0"/>
+          </a:p>
+        </p:txBody>
+      </p:sp>
+      <p:sp>
+        <p:nvSpPr>
+          <p:cNvPr id="17" name="Shape 15"/>
+          <p:cNvSpPr/>
+          <p:nvPr/>
+        </p:nvSpPr>
+        <p:spPr>
+          <a:xfrm>
+            <a:off x="5212080" y="2478024"/>
+            <a:ext cx="201168" cy="201168"/>
+          </a:xfrm>
+          <a:prstGeom prst="rect">
+            <a:avLst/>
+          </a:prstGeom>
+          <a:solidFill>
+            <a:srgbClr val="FFFFFF"/>
+          </a:solidFill>
+          <a:ln w="19050">
+            <a:solidFill>
+              <a:srgbClr val="024731"/>
+            </a:solidFill>
+            <a:prstDash val="solid"/>
+          </a:ln>
+        </p:spPr>
+        <p:txBody>
+          <a:bodyPr/>
+          <a:lstStyle/>
+          <a:p>
+            <a:endParaRPr lang="en-US"/>
+          </a:p>
+        </p:txBody>
+      </p:sp>
+      <p:sp>
+        <p:nvSpPr>
+          <p:cNvPr id="18" name="Text 16"/>
+          <p:cNvSpPr/>
+          <p:nvPr/>
+        </p:nvSpPr>
+        <p:spPr>
+          <a:xfrm>
+            <a:off x="5532120" y="2459736"/>
+            <a:ext cx="3108960" cy="228600"/>
+          </a:xfrm>
+          <a:prstGeom prst="rect">
+            <a:avLst/>
+          </a:prstGeom>
+          <a:noFill/>
+          <a:ln/>
+        </p:spPr>
+        <p:txBody>
+          <a:bodyPr wrap="square" lIns="0" tIns="0" rIns="0" bIns="0" rtlCol="0" anchor="ctr"/>
+          <a:lstStyle/>
+          <a:p>
+            <a:pPr marL="0" indent="0">
+              <a:buNone/>
+            </a:pPr>
+            <a:r>
+              <a:rPr lang="en-US" sz="1000" dirty="0">
+                <a:solidFill>
+                  <a:srgbClr val="0D0D0D"/>
+                </a:solidFill>
+                <a:latin typeface="Open Sans" pitchFamily="34" charset="0"/>
+                <a:ea typeface="Open Sans" pitchFamily="34" charset="-122"/>
+                <a:cs typeface="Open Sans" pitchFamily="34" charset="-120"/>
+              </a:rPr>
+              <a:t>gaap-bridge-template.xlsx</a:t>
+            </a:r>
+            <a:endParaRPr lang="en-US" sz="1000" dirty="0"/>
+          </a:p>
+        </p:txBody>
+      </p:sp>
+      <p:sp>
+        <p:nvSpPr>
+          <p:cNvPr id="19" name="Shape 17"/>
+          <p:cNvSpPr/>
+          <p:nvPr/>
+        </p:nvSpPr>
+        <p:spPr>
+          <a:xfrm>
+            <a:off x="5212080" y="2825496"/>
+            <a:ext cx="201168" cy="201168"/>
+          </a:xfrm>
+          <a:prstGeom prst="rect">
+            <a:avLst/>
+          </a:prstGeom>
+          <a:solidFill>
+            <a:srgbClr val="FFFFFF"/>
+          </a:solidFill>
+          <a:ln w="19050">
+            <a:solidFill>
+              <a:srgbClr val="024731"/>
+            </a:solidFill>
+            <a:prstDash val="solid"/>
+          </a:ln>
+        </p:spPr>
+        <p:txBody>
+          <a:bodyPr/>
+          <a:lstStyle/>
+          <a:p>
+            <a:endParaRPr lang="en-US"/>
+          </a:p>
+        </p:txBody>
+      </p:sp>
+      <p:sp>
+        <p:nvSpPr>
+          <p:cNvPr id="20" name="Text 18"/>
+          <p:cNvSpPr/>
+          <p:nvPr/>
+        </p:nvSpPr>
+        <p:spPr>
+          <a:xfrm>
+            <a:off x="5532120" y="2807208"/>
+            <a:ext cx="3108960" cy="228600"/>
+          </a:xfrm>
+          <a:prstGeom prst="rect">
+            <a:avLst/>
+          </a:prstGeom>
+          <a:noFill/>
+          <a:ln/>
+        </p:spPr>
+        <p:txBody>
+          <a:bodyPr wrap="square" lIns="0" tIns="0" rIns="0" bIns="0" rtlCol="0" anchor="ctr"/>
+          <a:lstStyle/>
+          <a:p>
+            <a:pPr marL="0" indent="0">
+              <a:buNone/>
+            </a:pPr>
+            <a:r>
+              <a:rPr lang="en-US" sz="1000" dirty="0">
+                <a:solidFill>
+                  <a:srgbClr val="0D0D0D"/>
+                </a:solidFill>
+                <a:latin typeface="Open Sans" pitchFamily="34" charset="0"/>
+                <a:ea typeface="Open Sans" pitchFamily="34" charset="-122"/>
+                <a:cs typeface="Open Sans" pitchFamily="34" charset="-120"/>
+              </a:rPr>
+              <a:t>4. Flag affected ratios</a:t>
+            </a:r>
+            <a:endParaRPr lang="en-US" sz="1000" dirty="0"/>
+          </a:p>
+        </p:txBody>
+      </p:sp>
+      <p:sp>
+        <p:nvSpPr>
+          <p:cNvPr id="21" name="Shape 19"/>
+          <p:cNvSpPr/>
+          <p:nvPr/>
+        </p:nvSpPr>
+        <p:spPr>
+          <a:xfrm>
+            <a:off x="5212080" y="3172968"/>
+            <a:ext cx="201168" cy="201168"/>
+          </a:xfrm>
+          <a:prstGeom prst="rect">
+            <a:avLst/>
+          </a:prstGeom>
+          <a:solidFill>
+            <a:srgbClr val="FFFFFF"/>
+          </a:solidFill>
+          <a:ln w="19050">
+            <a:solidFill>
+              <a:srgbClr val="024731"/>
+            </a:solidFill>
+            <a:prstDash val="solid"/>
+          </a:ln>
+        </p:spPr>
+        <p:txBody>
+          <a:bodyPr/>
+          <a:lstStyle/>
+          <a:p>
+            <a:endParaRPr lang="en-US"/>
+          </a:p>
+        </p:txBody>
+      </p:sp>
+      <p:sp>
+        <p:nvSpPr>
+          <p:cNvPr id="22" name="Text 20"/>
+          <p:cNvSpPr/>
+          <p:nvPr/>
+        </p:nvSpPr>
+        <p:spPr>
+          <a:xfrm>
+            <a:off x="5532120" y="3154680"/>
+            <a:ext cx="3108960" cy="228600"/>
+          </a:xfrm>
+          <a:prstGeom prst="rect">
+            <a:avLst/>
+          </a:prstGeom>
+          <a:noFill/>
+          <a:ln/>
+        </p:spPr>
+        <p:txBody>
+          <a:bodyPr wrap="square" lIns="0" tIns="0" rIns="0" bIns="0" rtlCol="0" anchor="ctr"/>
+          <a:lstStyle/>
+          <a:p>
+            <a:pPr marL="0" indent="0">
+              <a:buNone/>
+            </a:pPr>
+            <a:r>
+              <a:rPr lang="en-US" sz="1000" dirty="0">
+                <a:solidFill>
+                  <a:srgbClr val="0D0D0D"/>
+                </a:solidFill>
+                <a:latin typeface="Open Sans" pitchFamily="34" charset="0"/>
+                <a:ea typeface="Open Sans" pitchFamily="34" charset="-122"/>
+                <a:cs typeface="Open Sans" pitchFamily="34" charset="-120"/>
+              </a:rPr>
+              <a:t>Add cell comments referencing</a:t>
+            </a:r>
+            <a:endParaRPr lang="en-US" sz="1000" dirty="0"/>
+          </a:p>
+        </p:txBody>
+      </p:sp>
+      <p:sp>
+        <p:nvSpPr>
+          <p:cNvPr id="23" name="Shape 21"/>
+          <p:cNvSpPr/>
+          <p:nvPr/>
+        </p:nvSpPr>
+        <p:spPr>
+          <a:xfrm>
+            <a:off x="5212080" y="3520440"/>
+            <a:ext cx="201168" cy="201168"/>
+          </a:xfrm>
+          <a:prstGeom prst="rect">
+            <a:avLst/>
+          </a:prstGeom>
+          <a:solidFill>
+            <a:srgbClr val="FFFFFF"/>
+          </a:solidFill>
+          <a:ln w="19050">
+            <a:solidFill>
+              <a:srgbClr val="024731"/>
+            </a:solidFill>
+            <a:prstDash val="solid"/>
+          </a:ln>
+        </p:spPr>
+        <p:txBody>
+          <a:bodyPr/>
+          <a:lstStyle/>
+          <a:p>
+            <a:endParaRPr lang="en-US"/>
+          </a:p>
+        </p:txBody>
+      </p:sp>
+      <p:sp>
+        <p:nvSpPr>
+          <p:cNvPr id="24" name="Text 22"/>
+          <p:cNvSpPr/>
+          <p:nvPr/>
+        </p:nvSpPr>
+        <p:spPr>
+          <a:xfrm>
+            <a:off x="5532120" y="3502152"/>
+            <a:ext cx="3108960" cy="228600"/>
+          </a:xfrm>
+          <a:prstGeom prst="rect">
+            <a:avLst/>
+          </a:prstGeom>
+          <a:noFill/>
+          <a:ln/>
+        </p:spPr>
+        <p:txBody>
+          <a:bodyPr wrap="square" lIns="0" tIns="0" rIns="0" bIns="0" rtlCol="0" anchor="ctr"/>
+          <a:lstStyle/>
+          <a:p>
+            <a:pPr marL="0" indent="0">
+              <a:buNone/>
+            </a:pPr>
+            <a:r>
+              <a:rPr lang="en-US" sz="1000" dirty="0">
+                <a:solidFill>
+                  <a:srgbClr val="0D0D0D"/>
+                </a:solidFill>
+                <a:latin typeface="Open Sans" pitchFamily="34" charset="0"/>
+                <a:ea typeface="Open Sans" pitchFamily="34" charset="-122"/>
+                <a:cs typeface="Open Sans" pitchFamily="34" charset="-120"/>
+              </a:rPr>
+              <a:t>GAAP Bridge rows on Ratios tab</a:t>
+            </a:r>
+            <a:endParaRPr lang="en-US" sz="1000" dirty="0"/>
+          </a:p>
+        </p:txBody>
+      </p:sp>
+      <p:sp>
+        <p:nvSpPr>
+          <p:cNvPr id="29" name="Shape 27"/>
+          <p:cNvSpPr/>
+          <p:nvPr/>
+        </p:nvSpPr>
+        <p:spPr>
+          <a:xfrm>
+            <a:off x="548640" y="4434840"/>
+            <a:ext cx="4114800" cy="457200"/>
+          </a:xfrm>
+          <a:prstGeom prst="rect">
+            <a:avLst/>
+          </a:prstGeom>
+          <a:solidFill>
+            <a:srgbClr val="024731"/>
+          </a:solidFill>
+          <a:ln/>
+        </p:spPr>
+        <p:txBody>
+          <a:bodyPr/>
+          <a:lstStyle/>
+          <a:p>
+            <a:endParaRPr lang="en-US"/>
+          </a:p>
+        </p:txBody>
+      </p:sp>
+      <p:sp>
+        <p:nvSpPr>
+          <p:cNvPr id="30" name="Text 28"/>
+          <p:cNvSpPr/>
+          <p:nvPr/>
+        </p:nvSpPr>
+        <p:spPr>
+          <a:xfrm>
+            <a:off x="685800" y="4453128"/>
+            <a:ext cx="3840480" cy="411480"/>
+          </a:xfrm>
+          <a:prstGeom prst="rect">
+            <a:avLst/>
+          </a:prstGeom>
+          <a:noFill/>
+          <a:ln/>
+        </p:spPr>
+        <p:txBody>
+          <a:bodyPr wrap="square" rtlCol="0" anchor="ctr"/>
+          <a:lstStyle/>
+          <a:p>
+            <a:pPr marL="0" indent="0">
+              <a:buNone/>
+            </a:pPr>
+            <a:r>
+              <a:rPr lang="en-US" sz="1000" dirty="0">
+                <a:solidFill>
+                  <a:srgbClr val="FFFFFF"/>
+                </a:solidFill>
+                <a:latin typeface="Open Sans" pitchFamily="34" charset="0"/>
+                <a:ea typeface="Open Sans" pitchFamily="34" charset="-122"/>
+                <a:cs typeface="Open Sans" pitchFamily="34" charset="-120"/>
+              </a:rPr>
+              <a:t>Do NOT restate your financials. The GAAP Bridge is a disclosure exercise showing you understand the differences.</a:t>
+            </a:r>
+            <a:endParaRPr lang="en-US" sz="1000" dirty="0"/>
+          </a:p>
+        </p:txBody>
+      </p:sp>
+    </p:spTree>
+  </p:cSld>
+  <p:clrMapOvr>
+    <a:masterClrMapping/>
+  </p:clrMapOvr>
+</p:sld>
+</file>
+
+<file path=ppt/slides/slide55.xml><?xml version="1.0" encoding="utf-8"?>
+<p:sld xmlns:a="http://schemas.openxmlformats.org/drawingml/2006/main" xmlns:r="http://schemas.openxmlformats.org/officeDocument/2006/relationships" xmlns:p="http://schemas.openxmlformats.org/presentationml/2006/main">
+  <p:cSld name="Slide 8">
+    <p:bg>
+      <p:bgPr>
+        <a:solidFill>
+          <a:srgbClr val="FFFFFF"/>
+        </a:solidFill>
+        <a:effectLst/>
+      </p:bgPr>
+    </p:bg>
+    <p:spTree>
+      <p:nvGrpSpPr>
+        <p:cNvPr id="1" name=""/>
+        <p:cNvGrpSpPr/>
+        <p:nvPr/>
+      </p:nvGrpSpPr>
+      <p:grpSpPr>
+        <a:xfrm>
+          <a:off x="0" y="0"/>
+          <a:ext cx="0" cy="0"/>
+          <a:chOff x="0" y="0"/>
+          <a:chExt cx="0" cy="0"/>
+        </a:xfrm>
+      </p:grpSpPr>
+      <p:sp>
+        <p:nvSpPr>
+          <p:cNvPr id="2" name="Shape 0"/>
+          <p:cNvSpPr/>
+          <p:nvPr/>
+        </p:nvSpPr>
+        <p:spPr>
+          <a:xfrm>
+            <a:off x="0" y="0"/>
+            <a:ext cx="9144000" cy="822960"/>
+          </a:xfrm>
+          <a:prstGeom prst="rect">
+            <a:avLst/>
+          </a:prstGeom>
+          <a:solidFill>
+            <a:srgbClr val="024731"/>
+          </a:solidFill>
+          <a:ln/>
+        </p:spPr>
+        <p:txBody>
+          <a:bodyPr/>
+          <a:lstStyle/>
+          <a:p>
+            <a:endParaRPr lang="en-US"/>
+          </a:p>
+        </p:txBody>
+      </p:sp>
+      <p:sp>
+        <p:nvSpPr>
+          <p:cNvPr id="3" name="Text 1"/>
+          <p:cNvSpPr/>
+          <p:nvPr/>
+        </p:nvSpPr>
+        <p:spPr>
+          <a:xfrm>
+            <a:off x="548640" y="137160"/>
+            <a:ext cx="7315200" cy="274320"/>
+          </a:xfrm>
+          <a:prstGeom prst="rect">
+            <a:avLst/>
+          </a:prstGeom>
+          <a:noFill/>
+          <a:ln/>
+        </p:spPr>
+        <p:txBody>
+          <a:bodyPr wrap="square" lIns="0" tIns="0" rIns="0" bIns="0" rtlCol="0" anchor="ctr"/>
+          <a:lstStyle/>
+          <a:p>
+            <a:pPr marL="0" indent="0">
+              <a:buNone/>
+            </a:pPr>
+            <a:r>
+              <a:rPr lang="en-US" sz="2000" b="1" dirty="0">
+                <a:solidFill>
+                  <a:srgbClr val="FFFFFF"/>
+                </a:solidFill>
+                <a:latin typeface="Open Sans" pitchFamily="34" charset="0"/>
+                <a:ea typeface="Open Sans" pitchFamily="34" charset="-122"/>
+                <a:cs typeface="Open Sans" pitchFamily="34" charset="-120"/>
+              </a:rPr>
+              <a:t>Resources &amp; Where to Find Them</a:t>
+            </a:r>
+            <a:endParaRPr lang="en-US" sz="2000" dirty="0"/>
+          </a:p>
+        </p:txBody>
+      </p:sp>
+      <p:sp>
+        <p:nvSpPr>
+          <p:cNvPr id="4" name="Text 2"/>
+          <p:cNvSpPr/>
+          <p:nvPr/>
+        </p:nvSpPr>
+        <p:spPr>
+          <a:xfrm>
+            <a:off x="548640" y="429768"/>
+            <a:ext cx="7315200" cy="228600"/>
+          </a:xfrm>
+          <a:prstGeom prst="rect">
+            <a:avLst/>
+          </a:prstGeom>
+          <a:noFill/>
+          <a:ln/>
+        </p:spPr>
+        <p:txBody>
+          <a:bodyPr wrap="square" lIns="0" tIns="0" rIns="0" bIns="0" rtlCol="0" anchor="ctr"/>
+          <a:lstStyle/>
+          <a:p>
+            <a:pPr marL="0" indent="0">
+              <a:buNone/>
+            </a:pPr>
+            <a:r>
+              <a:rPr lang="en-US" sz="1100" dirty="0">
+                <a:solidFill>
+                  <a:srgbClr val="B8DDD1"/>
+                </a:solidFill>
+                <a:latin typeface="Open Sans" pitchFamily="34" charset="0"/>
+                <a:ea typeface="Open Sans" pitchFamily="34" charset="-122"/>
+                <a:cs typeface="Open Sans" pitchFamily="34" charset="-120"/>
+              </a:rPr>
+              <a:t>Appendix C  |  Three documents in the course repo support your GAAP conversion work</a:t>
+            </a:r>
+            <a:endParaRPr lang="en-US" sz="1100" dirty="0"/>
+          </a:p>
+        </p:txBody>
+      </p:sp>
+      <p:sp>
+        <p:nvSpPr>
+          <p:cNvPr id="5" name="Text 3"/>
+          <p:cNvSpPr/>
+          <p:nvPr/>
+        </p:nvSpPr>
+        <p:spPr>
+          <a:xfrm>
+            <a:off x="548640" y="1051560"/>
+            <a:ext cx="4114800" cy="274320"/>
+          </a:xfrm>
+          <a:prstGeom prst="rect">
+            <a:avLst/>
+          </a:prstGeom>
+          <a:noFill/>
+          <a:ln/>
+        </p:spPr>
+        <p:txBody>
+          <a:bodyPr wrap="square" lIns="0" tIns="0" rIns="0" bIns="0" rtlCol="0" anchor="ctr"/>
+          <a:lstStyle/>
+          <a:p>
+            <a:pPr marL="0" indent="0">
+              <a:buNone/>
+            </a:pPr>
+            <a:r>
+              <a:rPr lang="en-US" sz="1400" b="1" dirty="0">
+                <a:solidFill>
+                  <a:srgbClr val="024731"/>
+                </a:solidFill>
+                <a:latin typeface="Open Sans" pitchFamily="34" charset="0"/>
+                <a:ea typeface="Open Sans" pitchFamily="34" charset="-122"/>
+                <a:cs typeface="Open Sans" pitchFamily="34" charset="-120"/>
+              </a:rPr>
+              <a:t>Documents in the Course Repo</a:t>
+            </a:r>
+            <a:endParaRPr lang="en-US" sz="1400" dirty="0"/>
+          </a:p>
+        </p:txBody>
+      </p:sp>
+      <p:sp>
+        <p:nvSpPr>
+          <p:cNvPr id="6" name="Shape 4"/>
+          <p:cNvSpPr/>
+          <p:nvPr/>
+        </p:nvSpPr>
+        <p:spPr>
+          <a:xfrm>
+            <a:off x="548640" y="1417320"/>
+            <a:ext cx="4114800" cy="502920"/>
+          </a:xfrm>
+          <a:prstGeom prst="rect">
+            <a:avLst/>
+          </a:prstGeom>
+          <a:solidFill>
+            <a:srgbClr val="E6F2EF"/>
+          </a:solidFill>
+          <a:ln/>
+        </p:spPr>
+        <p:txBody>
+          <a:bodyPr/>
+          <a:lstStyle/>
+          <a:p>
+            <a:endParaRPr lang="en-US"/>
+          </a:p>
+        </p:txBody>
+      </p:sp>
+      <p:sp>
+        <p:nvSpPr>
+          <p:cNvPr id="7" name="Text 5"/>
+          <p:cNvSpPr/>
+          <p:nvPr/>
+        </p:nvSpPr>
+        <p:spPr>
+          <a:xfrm>
+            <a:off x="685800" y="1463040"/>
+            <a:ext cx="3840480" cy="411480"/>
+          </a:xfrm>
+          <a:prstGeom prst="rect">
+            <a:avLst/>
+          </a:prstGeom>
+          <a:noFill/>
+          <a:ln/>
+        </p:spPr>
+        <p:txBody>
+          <a:bodyPr wrap="square" rtlCol="0" anchor="ctr"/>
+          <a:lstStyle/>
+          <a:p>
+            <a:pPr marL="0" indent="0">
+              <a:buNone/>
+            </a:pPr>
+            <a:r>
+              <a:rPr lang="en-US" sz="1100" b="1" dirty="0">
+                <a:solidFill>
+                  <a:srgbClr val="024731"/>
+                </a:solidFill>
+                <a:latin typeface="Open Sans" pitchFamily="34" charset="0"/>
+                <a:ea typeface="Open Sans" pitchFamily="34" charset="-122"/>
+                <a:cs typeface="Open Sans" pitchFamily="34" charset="-120"/>
+              </a:rPr>
+              <a:t>Quick-Reference (start here)</a:t>
+            </a:r>
+            <a:endParaRPr lang="en-US" sz="1100" dirty="0"/>
+          </a:p>
+          <a:p>
+            <a:pPr marL="0" indent="0">
+              <a:buNone/>
+            </a:pPr>
+            <a:r>
+              <a:rPr lang="en-US" sz="1100" dirty="0">
+                <a:solidFill>
+                  <a:srgbClr val="024731"/>
+                </a:solidFill>
+                <a:latin typeface="Open Sans" pitchFamily="34" charset="0"/>
+                <a:ea typeface="Open Sans" pitchFamily="34" charset="-122"/>
+                <a:cs typeface="Open Sans" pitchFamily="34" charset="-120"/>
+              </a:rPr>
+              <a:t xml:space="preserve">    docs/templates/gaap-conversion-quickref.md</a:t>
+            </a:r>
+            <a:endParaRPr lang="en-US" sz="1100" dirty="0"/>
+          </a:p>
+        </p:txBody>
+      </p:sp>
+      <p:sp>
+        <p:nvSpPr>
+          <p:cNvPr id="8" name="Shape 6"/>
+          <p:cNvSpPr/>
+          <p:nvPr/>
+        </p:nvSpPr>
+        <p:spPr>
+          <a:xfrm>
+            <a:off x="548640" y="2011680"/>
+            <a:ext cx="4114800" cy="502920"/>
+          </a:xfrm>
+          <a:prstGeom prst="rect">
+            <a:avLst/>
+          </a:prstGeom>
+          <a:solidFill>
+            <a:srgbClr val="E6F2EF"/>
+          </a:solidFill>
+          <a:ln/>
+        </p:spPr>
+        <p:txBody>
+          <a:bodyPr/>
+          <a:lstStyle/>
+          <a:p>
+            <a:endParaRPr lang="en-US"/>
+          </a:p>
+        </p:txBody>
+      </p:sp>
+      <p:sp>
+        <p:nvSpPr>
+          <p:cNvPr id="9" name="Text 7"/>
+          <p:cNvSpPr/>
+          <p:nvPr/>
+        </p:nvSpPr>
+        <p:spPr>
+          <a:xfrm>
+            <a:off x="685800" y="2057400"/>
+            <a:ext cx="3840480" cy="411480"/>
+          </a:xfrm>
+          <a:prstGeom prst="rect">
+            <a:avLst/>
+          </a:prstGeom>
+          <a:noFill/>
+          <a:ln/>
+        </p:spPr>
+        <p:txBody>
+          <a:bodyPr wrap="square" rtlCol="0" anchor="ctr"/>
+          <a:lstStyle/>
+          <a:p>
+            <a:pPr marL="0" indent="0">
+              <a:buNone/>
+            </a:pPr>
+            <a:r>
+              <a:rPr lang="en-US" sz="1100" b="1" dirty="0">
+                <a:solidFill>
+                  <a:srgbClr val="024731"/>
+                </a:solidFill>
+                <a:latin typeface="Open Sans" pitchFamily="34" charset="0"/>
+                <a:ea typeface="Open Sans" pitchFamily="34" charset="-122"/>
+                <a:cs typeface="Open Sans" pitchFamily="34" charset="-120"/>
+              </a:rPr>
+              <a:t>GAAP Bridge Template (.xlsx)</a:t>
+            </a:r>
+            <a:endParaRPr lang="en-US" sz="1100" dirty="0"/>
+          </a:p>
+          <a:p>
+            <a:pPr marL="0" indent="0">
+              <a:buNone/>
+            </a:pPr>
+            <a:r>
+              <a:rPr lang="en-US" sz="1100" dirty="0">
+                <a:solidFill>
+                  <a:srgbClr val="024731"/>
+                </a:solidFill>
+                <a:latin typeface="Open Sans" pitchFamily="34" charset="0"/>
+                <a:ea typeface="Open Sans" pitchFamily="34" charset="-122"/>
+                <a:cs typeface="Open Sans" pitchFamily="34" charset="-120"/>
+              </a:rPr>
+              <a:t xml:space="preserve">    models/templates/gaap-bridge-template.xlsx</a:t>
+            </a:r>
+            <a:endParaRPr lang="en-US" sz="1100" dirty="0"/>
+          </a:p>
+        </p:txBody>
+      </p:sp>
+      <p:sp>
+        <p:nvSpPr>
+          <p:cNvPr id="10" name="Shape 8"/>
+          <p:cNvSpPr/>
+          <p:nvPr/>
+        </p:nvSpPr>
+        <p:spPr>
+          <a:xfrm>
+            <a:off x="4937760" y="1051560"/>
+            <a:ext cx="3840480" cy="3749040"/>
+          </a:xfrm>
+          <a:prstGeom prst="rect">
+            <a:avLst/>
+          </a:prstGeom>
+          <a:solidFill>
+            <a:srgbClr val="F5F7F6"/>
+          </a:solidFill>
+          <a:ln/>
+          <a:effectLst>
+            <a:outerShdw blurRad="50800" dist="12700" dir="8100000" algn="bl" rotWithShape="0">
+              <a:srgbClr val="000000">
+                <a:alpha val="10000"/>
+              </a:srgbClr>
+            </a:outerShdw>
+          </a:effectLst>
+        </p:spPr>
+        <p:txBody>
+          <a:bodyPr/>
+          <a:lstStyle/>
+          <a:p>
+            <a:endParaRPr lang="en-US"/>
+          </a:p>
+        </p:txBody>
+      </p:sp>
+      <p:sp>
+        <p:nvSpPr>
+          <p:cNvPr id="11" name="Text 9"/>
+          <p:cNvSpPr/>
+          <p:nvPr/>
+        </p:nvSpPr>
+        <p:spPr>
+          <a:xfrm>
+            <a:off x="4946904" y="1143000"/>
+            <a:ext cx="3822192" cy="320040"/>
+          </a:xfrm>
+          <a:prstGeom prst="rect">
+            <a:avLst/>
+          </a:prstGeom>
+          <a:noFill/>
+          <a:ln/>
+        </p:spPr>
+        <p:txBody>
+          <a:bodyPr wrap="square" lIns="0" tIns="0" rIns="0" bIns="0" rtlCol="0" anchor="ctr"/>
+          <a:lstStyle/>
+          <a:p>
+            <a:pPr marL="0" indent="0">
+              <a:buNone/>
+            </a:pPr>
+            <a:r>
+              <a:rPr lang="en-US" sz="1400" b="1" dirty="0">
+                <a:solidFill>
+                  <a:srgbClr val="024731"/>
+                </a:solidFill>
+                <a:latin typeface="Open Sans" pitchFamily="34" charset="0"/>
+                <a:ea typeface="Open Sans" pitchFamily="34" charset="-122"/>
+                <a:cs typeface="Open Sans" pitchFamily="34" charset="-120"/>
+              </a:rPr>
+              <a:t>Full Decision Memo (optional)</a:t>
+            </a:r>
+            <a:endParaRPr lang="en-US" sz="1400" dirty="0"/>
+          </a:p>
+        </p:txBody>
+      </p:sp>
+      <p:sp>
+        <p:nvSpPr>
+          <p:cNvPr id="12" name="Text 10"/>
+          <p:cNvSpPr/>
+          <p:nvPr/>
+        </p:nvSpPr>
+        <p:spPr>
+          <a:xfrm>
+            <a:off x="5120640" y="1417320"/>
+            <a:ext cx="3474720" cy="228600"/>
+          </a:xfrm>
+          <a:prstGeom prst="rect">
+            <a:avLst/>
+          </a:prstGeom>
+          <a:noFill/>
+          <a:ln/>
+        </p:spPr>
+        <p:txBody>
+          <a:bodyPr wrap="square" lIns="0" tIns="0" rIns="0" bIns="0" rtlCol="0" anchor="ctr"/>
+          <a:lstStyle/>
+          <a:p>
+            <a:pPr marL="0" indent="0">
+              <a:buNone/>
+            </a:pPr>
+            <a:r>
+              <a:rPr lang="en-US" sz="900" i="1" dirty="0">
+                <a:solidFill>
+                  <a:srgbClr val="6B7280"/>
+                </a:solidFill>
+                <a:latin typeface="Open Sans" pitchFamily="34" charset="0"/>
+                <a:ea typeface="Open Sans" pitchFamily="34" charset="-122"/>
+                <a:cs typeface="Open Sans" pitchFamily="34" charset="-120"/>
+              </a:rPr>
+              <a:t>For deeper reading, not required</a:t>
+            </a:r>
+            <a:endParaRPr lang="en-US" sz="900" dirty="0"/>
+          </a:p>
+        </p:txBody>
+      </p:sp>
+      <p:sp>
+        <p:nvSpPr>
+          <p:cNvPr id="13" name="Shape 11"/>
+          <p:cNvSpPr/>
+          <p:nvPr/>
+        </p:nvSpPr>
+        <p:spPr>
+          <a:xfrm>
+            <a:off x="5212080" y="1783080"/>
+            <a:ext cx="201168" cy="201168"/>
+          </a:xfrm>
+          <a:prstGeom prst="rect">
+            <a:avLst/>
+          </a:prstGeom>
+          <a:solidFill>
+            <a:srgbClr val="FFFFFF"/>
+          </a:solidFill>
+          <a:ln w="19050">
+            <a:solidFill>
+              <a:srgbClr val="024731"/>
+            </a:solidFill>
+            <a:prstDash val="solid"/>
+          </a:ln>
+        </p:spPr>
+        <p:txBody>
+          <a:bodyPr/>
+          <a:lstStyle/>
+          <a:p>
+            <a:endParaRPr lang="en-US"/>
+          </a:p>
+        </p:txBody>
+      </p:sp>
+      <p:sp>
+        <p:nvSpPr>
+          <p:cNvPr id="14" name="Text 12"/>
+          <p:cNvSpPr/>
+          <p:nvPr/>
+        </p:nvSpPr>
+        <p:spPr>
+          <a:xfrm>
+            <a:off x="5532120" y="1764792"/>
+            <a:ext cx="3108960" cy="228600"/>
+          </a:xfrm>
+          <a:prstGeom prst="rect">
+            <a:avLst/>
+          </a:prstGeom>
+          <a:noFill/>
+          <a:ln/>
+        </p:spPr>
+        <p:txBody>
+          <a:bodyPr wrap="square" lIns="0" tIns="0" rIns="0" bIns="0" rtlCol="0" anchor="ctr"/>
+          <a:lstStyle/>
+          <a:p>
+            <a:pPr marL="0" indent="0">
+              <a:buNone/>
+            </a:pPr>
+            <a:r>
+              <a:rPr lang="en-US" sz="1000" dirty="0">
+                <a:solidFill>
+                  <a:srgbClr val="0D0D0D"/>
+                </a:solidFill>
+                <a:latin typeface="Open Sans" pitchFamily="34" charset="0"/>
+                <a:ea typeface="Open Sans" pitchFamily="34" charset="-122"/>
+                <a:cs typeface="Open Sans" pitchFamily="34" charset="-120"/>
+              </a:rPr>
+              <a:t>7 frameworks surveyed (US GAAP,</a:t>
+            </a:r>
+            <a:endParaRPr lang="en-US" sz="1000" dirty="0"/>
+          </a:p>
+        </p:txBody>
+      </p:sp>
+      <p:sp>
+        <p:nvSpPr>
+          <p:cNvPr id="15" name="Shape 13"/>
+          <p:cNvSpPr/>
+          <p:nvPr/>
+        </p:nvSpPr>
+        <p:spPr>
+          <a:xfrm>
+            <a:off x="5212080" y="2130552"/>
+            <a:ext cx="201168" cy="201168"/>
+          </a:xfrm>
+          <a:prstGeom prst="rect">
+            <a:avLst/>
+          </a:prstGeom>
+          <a:solidFill>
+            <a:srgbClr val="FFFFFF"/>
+          </a:solidFill>
+          <a:ln w="19050">
+            <a:solidFill>
+              <a:srgbClr val="024731"/>
+            </a:solidFill>
+            <a:prstDash val="solid"/>
+          </a:ln>
+        </p:spPr>
+        <p:txBody>
+          <a:bodyPr/>
+          <a:lstStyle/>
+          <a:p>
+            <a:endParaRPr lang="en-US"/>
+          </a:p>
+        </p:txBody>
+      </p:sp>
+      <p:sp>
+        <p:nvSpPr>
+          <p:cNvPr id="16" name="Text 14"/>
+          <p:cNvSpPr/>
+          <p:nvPr/>
+        </p:nvSpPr>
+        <p:spPr>
+          <a:xfrm>
+            <a:off x="5532120" y="2112264"/>
+            <a:ext cx="3108960" cy="228600"/>
+          </a:xfrm>
+          <a:prstGeom prst="rect">
+            <a:avLst/>
+          </a:prstGeom>
+          <a:noFill/>
+          <a:ln/>
+        </p:spPr>
+        <p:txBody>
+          <a:bodyPr wrap="square" lIns="0" tIns="0" rIns="0" bIns="0" rtlCol="0" anchor="ctr"/>
+          <a:lstStyle/>
+          <a:p>
+            <a:pPr marL="0" indent="0">
+              <a:buNone/>
+            </a:pPr>
+            <a:r>
+              <a:rPr lang="en-US" sz="1000" dirty="0">
+                <a:solidFill>
+                  <a:srgbClr val="0D0D0D"/>
+                </a:solidFill>
+                <a:latin typeface="Open Sans" pitchFamily="34" charset="0"/>
+                <a:ea typeface="Open Sans" pitchFamily="34" charset="-122"/>
+                <a:cs typeface="Open Sans" pitchFamily="34" charset="-120"/>
+              </a:rPr>
+              <a:t>IFRS, VAS, CAS, JGAAP, Ind AS, SFRS)</a:t>
+            </a:r>
+            <a:endParaRPr lang="en-US" sz="1000" dirty="0"/>
+          </a:p>
+        </p:txBody>
+      </p:sp>
+      <p:sp>
+        <p:nvSpPr>
+          <p:cNvPr id="17" name="Shape 15"/>
+          <p:cNvSpPr/>
+          <p:nvPr/>
+        </p:nvSpPr>
+        <p:spPr>
+          <a:xfrm>
+            <a:off x="5212080" y="2478024"/>
+            <a:ext cx="201168" cy="201168"/>
+          </a:xfrm>
+          <a:prstGeom prst="rect">
+            <a:avLst/>
+          </a:prstGeom>
+          <a:solidFill>
+            <a:srgbClr val="FFFFFF"/>
+          </a:solidFill>
+          <a:ln w="19050">
+            <a:solidFill>
+              <a:srgbClr val="024731"/>
+            </a:solidFill>
+            <a:prstDash val="solid"/>
+          </a:ln>
+        </p:spPr>
+        <p:txBody>
+          <a:bodyPr/>
+          <a:lstStyle/>
+          <a:p>
+            <a:endParaRPr lang="en-US"/>
+          </a:p>
+        </p:txBody>
+      </p:sp>
+      <p:sp>
+        <p:nvSpPr>
+          <p:cNvPr id="18" name="Text 16"/>
+          <p:cNvSpPr/>
+          <p:nvPr/>
+        </p:nvSpPr>
+        <p:spPr>
+          <a:xfrm>
+            <a:off x="5532120" y="2459736"/>
+            <a:ext cx="3108960" cy="228600"/>
+          </a:xfrm>
+          <a:prstGeom prst="rect">
+            <a:avLst/>
+          </a:prstGeom>
+          <a:noFill/>
+          <a:ln/>
+        </p:spPr>
+        <p:txBody>
+          <a:bodyPr wrap="square" lIns="0" tIns="0" rIns="0" bIns="0" rtlCol="0" anchor="ctr"/>
+          <a:lstStyle/>
+          <a:p>
+            <a:pPr marL="0" indent="0">
+              <a:buNone/>
+            </a:pPr>
+            <a:r>
+              <a:rPr lang="en-US" sz="1000" dirty="0">
+                <a:solidFill>
+                  <a:srgbClr val="0D0D0D"/>
+                </a:solidFill>
+                <a:latin typeface="Open Sans" pitchFamily="34" charset="0"/>
+                <a:ea typeface="Open Sans" pitchFamily="34" charset="-122"/>
+                <a:cs typeface="Open Sans" pitchFamily="34" charset="-120"/>
+              </a:rPr>
+              <a:t>Conversion formulas for LIFO, R&amp;D,</a:t>
+            </a:r>
+            <a:endParaRPr lang="en-US" sz="1000" dirty="0"/>
+          </a:p>
+        </p:txBody>
+      </p:sp>
+      <p:sp>
+        <p:nvSpPr>
+          <p:cNvPr id="19" name="Shape 17"/>
+          <p:cNvSpPr/>
+          <p:nvPr/>
+        </p:nvSpPr>
+        <p:spPr>
+          <a:xfrm>
+            <a:off x="5212080" y="2825496"/>
+            <a:ext cx="201168" cy="201168"/>
+          </a:xfrm>
+          <a:prstGeom prst="rect">
+            <a:avLst/>
+          </a:prstGeom>
+          <a:solidFill>
+            <a:srgbClr val="FFFFFF"/>
+          </a:solidFill>
+          <a:ln w="19050">
+            <a:solidFill>
+              <a:srgbClr val="024731"/>
+            </a:solidFill>
+            <a:prstDash val="solid"/>
+          </a:ln>
+        </p:spPr>
+        <p:txBody>
+          <a:bodyPr/>
+          <a:lstStyle/>
+          <a:p>
+            <a:endParaRPr lang="en-US"/>
+          </a:p>
+        </p:txBody>
+      </p:sp>
+      <p:sp>
+        <p:nvSpPr>
+          <p:cNvPr id="20" name="Text 18"/>
+          <p:cNvSpPr/>
+          <p:nvPr/>
+        </p:nvSpPr>
+        <p:spPr>
+          <a:xfrm>
+            <a:off x="5532120" y="2807208"/>
+            <a:ext cx="3108960" cy="228600"/>
+          </a:xfrm>
+          <a:prstGeom prst="rect">
+            <a:avLst/>
+          </a:prstGeom>
+          <a:noFill/>
+          <a:ln/>
+        </p:spPr>
+        <p:txBody>
+          <a:bodyPr wrap="square" lIns="0" tIns="0" rIns="0" bIns="0" rtlCol="0" anchor="ctr"/>
+          <a:lstStyle/>
+          <a:p>
+            <a:pPr marL="0" indent="0">
+              <a:buNone/>
+            </a:pPr>
+            <a:r>
+              <a:rPr lang="en-US" sz="1000" dirty="0">
+                <a:solidFill>
+                  <a:srgbClr val="0D0D0D"/>
+                </a:solidFill>
+                <a:latin typeface="Open Sans" pitchFamily="34" charset="0"/>
+                <a:ea typeface="Open Sans" pitchFamily="34" charset="-122"/>
+                <a:cs typeface="Open Sans" pitchFamily="34" charset="-120"/>
+              </a:rPr>
+              <a:t>leases, impairment, pensions</a:t>
+            </a:r>
+            <a:endParaRPr lang="en-US" sz="1000" dirty="0"/>
+          </a:p>
+        </p:txBody>
+      </p:sp>
+      <p:sp>
+        <p:nvSpPr>
+          <p:cNvPr id="21" name="Shape 19"/>
+          <p:cNvSpPr/>
+          <p:nvPr/>
+        </p:nvSpPr>
+        <p:spPr>
+          <a:xfrm>
+            <a:off x="5212080" y="3172968"/>
+            <a:ext cx="201168" cy="201168"/>
+          </a:xfrm>
+          <a:prstGeom prst="rect">
+            <a:avLst/>
+          </a:prstGeom>
+          <a:solidFill>
+            <a:srgbClr val="FFFFFF"/>
+          </a:solidFill>
+          <a:ln w="19050">
+            <a:solidFill>
+              <a:srgbClr val="024731"/>
+            </a:solidFill>
+            <a:prstDash val="solid"/>
+          </a:ln>
+        </p:spPr>
+        <p:txBody>
+          <a:bodyPr/>
+          <a:lstStyle/>
+          <a:p>
+            <a:endParaRPr lang="en-US"/>
+          </a:p>
+        </p:txBody>
+      </p:sp>
+      <p:sp>
+        <p:nvSpPr>
+          <p:cNvPr id="22" name="Text 20"/>
+          <p:cNvSpPr/>
+          <p:nvPr/>
+        </p:nvSpPr>
+        <p:spPr>
+          <a:xfrm>
+            <a:off x="5532120" y="3154680"/>
+            <a:ext cx="3108960" cy="228600"/>
+          </a:xfrm>
+          <a:prstGeom prst="rect">
+            <a:avLst/>
+          </a:prstGeom>
+          <a:noFill/>
+          <a:ln/>
+        </p:spPr>
+        <p:txBody>
+          <a:bodyPr wrap="square" lIns="0" tIns="0" rIns="0" bIns="0" rtlCol="0" anchor="ctr"/>
+          <a:lstStyle/>
+          <a:p>
+            <a:pPr marL="0" indent="0">
+              <a:buNone/>
+            </a:pPr>
+            <a:r>
+              <a:rPr lang="en-US" sz="1000" dirty="0">
+                <a:solidFill>
+                  <a:srgbClr val="0D0D0D"/>
+                </a:solidFill>
+                <a:latin typeface="Open Sans" pitchFamily="34" charset="0"/>
+                <a:ea typeface="Open Sans" pitchFamily="34" charset="-122"/>
+                <a:cs typeface="Open Sans" pitchFamily="34" charset="-120"/>
+              </a:rPr>
+              <a:t>Global convergence status table</a:t>
+            </a:r>
+            <a:endParaRPr lang="en-US" sz="1000" dirty="0"/>
+          </a:p>
+        </p:txBody>
+      </p:sp>
+      <p:sp>
+        <p:nvSpPr>
+          <p:cNvPr id="23" name="Shape 21"/>
+          <p:cNvSpPr/>
+          <p:nvPr/>
+        </p:nvSpPr>
+        <p:spPr>
+          <a:xfrm>
+            <a:off x="5212080" y="3520440"/>
+            <a:ext cx="201168" cy="201168"/>
+          </a:xfrm>
+          <a:prstGeom prst="rect">
+            <a:avLst/>
+          </a:prstGeom>
+          <a:solidFill>
+            <a:srgbClr val="FFFFFF"/>
+          </a:solidFill>
+          <a:ln w="19050">
+            <a:solidFill>
+              <a:srgbClr val="024731"/>
+            </a:solidFill>
+            <a:prstDash val="solid"/>
+          </a:ln>
+        </p:spPr>
+        <p:txBody>
+          <a:bodyPr/>
+          <a:lstStyle/>
+          <a:p>
+            <a:endParaRPr lang="en-US"/>
+          </a:p>
+        </p:txBody>
+      </p:sp>
+      <p:sp>
+        <p:nvSpPr>
+          <p:cNvPr id="24" name="Text 22"/>
+          <p:cNvSpPr/>
+          <p:nvPr/>
+        </p:nvSpPr>
+        <p:spPr>
+          <a:xfrm>
+            <a:off x="5532120" y="3502152"/>
+            <a:ext cx="3108960" cy="228600"/>
+          </a:xfrm>
+          <a:prstGeom prst="rect">
+            <a:avLst/>
+          </a:prstGeom>
+          <a:noFill/>
+          <a:ln/>
+        </p:spPr>
+        <p:txBody>
+          <a:bodyPr wrap="square" lIns="0" tIns="0" rIns="0" bIns="0" rtlCol="0" anchor="ctr"/>
+          <a:lstStyle/>
+          <a:p>
+            <a:pPr marL="0" indent="0">
+              <a:buNone/>
+            </a:pPr>
+            <a:r>
+              <a:rPr lang="en-US" sz="1000" dirty="0">
+                <a:solidFill>
+                  <a:srgbClr val="0D0D0D"/>
+                </a:solidFill>
+                <a:latin typeface="Open Sans" pitchFamily="34" charset="0"/>
+                <a:ea typeface="Open Sans" pitchFamily="34" charset="-122"/>
+                <a:cs typeface="Open Sans" pitchFamily="34" charset="-120"/>
+              </a:rPr>
+              <a:t>docs/decisions/2026-05-24-...-framework.md</a:t>
+            </a:r>
+            <a:endParaRPr lang="en-US" sz="1000" dirty="0"/>
+          </a:p>
+        </p:txBody>
+      </p:sp>
+      <p:sp>
+        <p:nvSpPr>
+          <p:cNvPr id="29" name="Shape 27"/>
+          <p:cNvSpPr/>
+          <p:nvPr/>
+        </p:nvSpPr>
+        <p:spPr>
+          <a:xfrm>
+            <a:off x="548640" y="4434840"/>
+            <a:ext cx="4114800" cy="457200"/>
+          </a:xfrm>
+          <a:prstGeom prst="rect">
+            <a:avLst/>
+          </a:prstGeom>
+          <a:solidFill>
+            <a:srgbClr val="024731"/>
+          </a:solidFill>
+          <a:ln/>
+        </p:spPr>
+        <p:txBody>
+          <a:bodyPr/>
+          <a:lstStyle/>
+          <a:p>
+            <a:endParaRPr lang="en-US"/>
+          </a:p>
+        </p:txBody>
+      </p:sp>
+      <p:sp>
+        <p:nvSpPr>
+          <p:cNvPr id="30" name="Text 28"/>
+          <p:cNvSpPr/>
+          <p:nvPr/>
+        </p:nvSpPr>
+        <p:spPr>
+          <a:xfrm>
+            <a:off x="685800" y="4453128"/>
+            <a:ext cx="3840480" cy="411480"/>
+          </a:xfrm>
+          <a:prstGeom prst="rect">
+            <a:avLst/>
+          </a:prstGeom>
+          <a:noFill/>
+          <a:ln/>
+        </p:spPr>
+        <p:txBody>
+          <a:bodyPr wrap="square" rtlCol="0" anchor="ctr"/>
+          <a:lstStyle/>
+          <a:p>
+            <a:pPr marL="0" indent="0">
+              <a:buNone/>
+            </a:pPr>
+            <a:r>
+              <a:rPr lang="en-US" sz="1000" dirty="0">
+                <a:solidFill>
+                  <a:srgbClr val="FFFFFF"/>
+                </a:solidFill>
+                <a:latin typeface="Open Sans" pitchFamily="34" charset="0"/>
+                <a:ea typeface="Open Sans" pitchFamily="34" charset="-122"/>
+                <a:cs typeface="Open Sans" pitchFamily="34" charset="-120"/>
+              </a:rPr>
+              <a:t>Start with the quick-reference. Use the GAAP Bridge template in your workbook. Read the full memo only if you want the deep background.</a:t>
+            </a:r>
+            <a:endParaRPr lang="en-US" sz="1000" dirty="0"/>
+          </a:p>
+        </p:txBody>
+      </p:sp>
+    </p:spTree>
+  </p:cSld>
+  <p:clrMapOvr>
+    <a:masterClrMapping/>
+  </p:clrMapOvr>
+</p:sld>
+</file>
+
 <file path=ppt/slides/slide6.xml><?xml version="1.0" encoding="utf-8"?>
 <p:sld xmlns:a="http://schemas.openxmlformats.org/drawingml/2006/main" xmlns:r="http://schemas.openxmlformats.org/officeDocument/2006/relationships" xmlns:p="http://schemas.openxmlformats.org/presentationml/2006/main">
   <p:cSld>
@@ -45295,7 +48494,7 @@
                 <a:ea typeface="Open Sans" pitchFamily="34" charset="-122"/>
                 <a:cs typeface="Open Sans" pitchFamily="34" charset="-120"/>
               </a:rPr>
-              <a:t>GitHub is a cloud platform for version control. Think of it as Google Docs or </a:t>
+              <a:t xml:space="preserve">GitHub is a cloud platform for version control. Think of it as Google Docs or </a:t>
             </a:r>
             <a:r>
               <a:rPr lang="en-US" sz="1300" dirty="0" err="1">
@@ -45317,7 +48516,7 @@
                 <a:ea typeface="Open Sans" pitchFamily="34" charset="-122"/>
                 <a:cs typeface="Open Sans" pitchFamily="34" charset="-120"/>
               </a:rPr>
-              <a:t> for code and documents — every change is tracked, reversible, and visible to your instructor.</a:t>
+              <a:t xml:space="preserve"> for code and documents — every change is tracked, reversible, and visible to your instructor.</a:t>
             </a:r>
             <a:endParaRPr lang="en-US" sz="1300" dirty="0"/>
           </a:p>
